--- a/docs/Accelerators_Demo_Deck.pptx
+++ b/docs/Accelerators_Demo_Deck.pptx
@@ -17,6 +17,9 @@
     <p:sldId id="265" r:id="rId11"/>
     <p:sldId id="266" r:id="rId12"/>
     <p:sldId id="267" r:id="rId13"/>
+    <p:sldId id="270" r:id="rId21"/>
+    <p:sldId id="271" r:id="rId22"/>
+    <p:sldId id="272" r:id="rId23"/>
     <p:sldId id="268" r:id="rId14"/>
     <p:sldId id="269" r:id="rId15"/>
   </p:sldIdLst>
@@ -2159,7 +2162,7 @@
 
 <file path=ppt/slides/slide10.xml><?xml version="1.0" encoding="utf-8"?>
 <p:sld xmlns:a="http://schemas.openxmlformats.org/drawingml/2006/main" xmlns:r="http://schemas.openxmlformats.org/officeDocument/2006/relationships" xmlns:p="http://schemas.openxmlformats.org/presentationml/2006/main">
-  <p:cSld name="Slide 10">
+  <p:cSld name="Slide 1">
     <p:bg>
       <p:bgPr>
         <a:solidFill>
@@ -2267,12 +2270,12 @@
         </p:nvSpPr>
         <p:spPr>
           <a:xfrm>
-            <a:off x="548640" y="1371600"/>
-            <a:ext cx="5394960" cy="1417320"/>
+            <a:off x="548640" y="1600200"/>
+            <a:ext cx="3502152" cy="2148840"/>
           </a:xfrm>
           <a:prstGeom prst="roundRect">
             <a:avLst>
-              <a:gd name="adj" fmla="val 5161"/>
+              <a:gd name="adj" fmla="val 2128"/>
             </a:avLst>
           </a:prstGeom>
           <a:solidFill>
@@ -2289,11 +2292,13 @@
         </p:nvSpPr>
         <p:spPr>
           <a:xfrm>
-            <a:off x="777240" y="1572768"/>
-            <a:ext cx="91440" cy="1005840"/>
+            <a:off x="749808" y="1764792"/>
+            <a:ext cx="73152" cy="1819656"/>
           </a:xfrm>
           <a:prstGeom prst="roundRect">
-            <a:avLst/>
+            <a:avLst>
+              <a:gd name="adj" fmla="val 18750"/>
+            </a:avLst>
           </a:prstGeom>
           <a:solidFill>
             <a:srgbClr val="990011"/>
@@ -2309,24 +2314,24 @@
         </p:nvSpPr>
         <p:spPr>
           <a:xfrm>
-            <a:off x="1051560" y="1536192"/>
-            <a:ext cx="4663440" cy="365760"/>
-          </a:xfrm>
-          <a:prstGeom prst="rect">
-            <a:avLst/>
-          </a:prstGeom>
-          <a:noFill/>
-          <a:ln/>
-        </p:spPr>
-        <p:txBody>
-          <a:bodyPr wrap="square" lIns="0" tIns="0" rIns="0" bIns="0" rtlCol="0" anchor="ctr"/>
-          <a:lstStyle/>
-          <a:p>
-            <a:pPr indent="0" marL="0">
-              <a:buNone/>
-            </a:pPr>
-            <a:r>
-              <a:rPr lang="en-US" sz="1450" b="1" dirty="0">
+            <a:off x="987552" y="1728216"/>
+            <a:ext cx="2862072" cy="320040"/>
+          </a:xfrm>
+          <a:prstGeom prst="rect">
+            <a:avLst/>
+          </a:prstGeom>
+          <a:noFill/>
+          <a:ln/>
+        </p:spPr>
+        <p:txBody>
+          <a:bodyPr wrap="square" lIns="0" tIns="0" rIns="0" bIns="0" rtlCol="0" anchor="ctr"/>
+          <a:lstStyle/>
+          <a:p>
+            <a:pPr indent="0" marL="0">
+              <a:buNone/>
+            </a:pPr>
+            <a:r>
+              <a:rPr lang="en-US" sz="1400" b="1" dirty="0">
                 <a:solidFill>
                   <a:srgbClr val="1E2761"/>
                 </a:solidFill>
@@ -2336,7 +2341,7 @@
               </a:rPr>
               <a:t>Batch processing</a:t>
             </a:r>
-            <a:endParaRPr lang="en-US" sz="1450" dirty="0"/>
+            <a:endParaRPr lang="en-US" sz="1400" dirty="0"/>
           </a:p>
         </p:txBody>
       </p:sp>
@@ -2348,24 +2353,24 @@
         </p:nvSpPr>
         <p:spPr>
           <a:xfrm>
-            <a:off x="1051560" y="1938528"/>
-            <a:ext cx="4663440" cy="777240"/>
-          </a:xfrm>
-          <a:prstGeom prst="rect">
-            <a:avLst/>
-          </a:prstGeom>
-          <a:noFill/>
-          <a:ln/>
-        </p:spPr>
-        <p:txBody>
-          <a:bodyPr wrap="square" lIns="0" tIns="0" rIns="0" bIns="0" rtlCol="0" anchor="ctr"/>
-          <a:lstStyle/>
-          <a:p>
-            <a:pPr indent="0" marL="0">
-              <a:buNone/>
-            </a:pPr>
-            <a:r>
-              <a:rPr lang="en-US" sz="1150" dirty="0">
+            <a:off x="987552" y="2057400"/>
+            <a:ext cx="2862072" cy="1545336"/>
+          </a:xfrm>
+          <a:prstGeom prst="rect">
+            <a:avLst/>
+          </a:prstGeom>
+          <a:noFill/>
+          <a:ln/>
+        </p:spPr>
+        <p:txBody>
+          <a:bodyPr wrap="square" lIns="0" tIns="0" rIns="0" bIns="0" rtlCol="0" anchor="t"/>
+          <a:lstStyle/>
+          <a:p>
+            <a:pPr indent="0" marL="0">
+              <a:buNone/>
+            </a:pPr>
+            <a:r>
+              <a:rPr lang="en-US" sz="1050" dirty="0">
                 <a:solidFill>
                   <a:srgbClr val="5A5A6E"/>
                 </a:solidFill>
@@ -2375,7 +2380,7 @@
               </a:rPr>
               <a:t>execute_batch() — submit many inputs as one Anthropic Message Batches job, not a loop</a:t>
             </a:r>
-            <a:endParaRPr lang="en-US" sz="1150" dirty="0"/>
+            <a:endParaRPr lang="en-US" sz="1050" dirty="0"/>
           </a:p>
         </p:txBody>
       </p:sp>
@@ -2387,12 +2392,12 @@
         </p:nvSpPr>
         <p:spPr>
           <a:xfrm>
-            <a:off x="6217920" y="1371600"/>
-            <a:ext cx="5394960" cy="1417320"/>
+            <a:off x="4370832" y="1600200"/>
+            <a:ext cx="3502152" cy="2148840"/>
           </a:xfrm>
           <a:prstGeom prst="roundRect">
             <a:avLst>
-              <a:gd name="adj" fmla="val 5161"/>
+              <a:gd name="adj" fmla="val 2128"/>
             </a:avLst>
           </a:prstGeom>
           <a:solidFill>
@@ -2409,11 +2414,257 @@
         </p:nvSpPr>
         <p:spPr>
           <a:xfrm>
-            <a:off x="6446520" y="1572768"/>
-            <a:ext cx="91440" cy="1005840"/>
+            <a:off x="4572000" y="1764792"/>
+            <a:ext cx="73152" cy="1819656"/>
           </a:xfrm>
           <a:prstGeom prst="roundRect">
-            <a:avLst/>
+            <a:avLst>
+              <a:gd name="adj" fmla="val 18750"/>
+            </a:avLst>
+          </a:prstGeom>
+          <a:solidFill>
+            <a:srgbClr val="028090"/>
+          </a:solidFill>
+          <a:ln/>
+        </p:spPr>
+      </p:sp>
+      <p:sp>
+        <p:nvSpPr>
+          <p:cNvPr id="10" name="Text 8"/>
+          <p:cNvSpPr txBox="1"/>
+          <p:nvPr/>
+        </p:nvSpPr>
+        <p:spPr>
+          <a:xfrm>
+            <a:off x="4809744" y="1728216"/>
+            <a:ext cx="2862072" cy="320040"/>
+          </a:xfrm>
+          <a:prstGeom prst="rect">
+            <a:avLst/>
+          </a:prstGeom>
+          <a:noFill/>
+          <a:ln/>
+        </p:spPr>
+        <p:txBody>
+          <a:bodyPr wrap="square" lIns="0" tIns="0" rIns="0" bIns="0" rtlCol="0" anchor="ctr"/>
+          <a:lstStyle/>
+          <a:p>
+            <a:pPr indent="0" marL="0">
+              <a:buNone/>
+            </a:pPr>
+            <a:r>
+              <a:rPr lang="en-US" sz="1400" b="1" dirty="0">
+                <a:solidFill>
+                  <a:srgbClr val="1E2761"/>
+                </a:solidFill>
+                <a:latin typeface="Calibri" pitchFamily="34" charset="0"/>
+                <a:ea typeface="Calibri" pitchFamily="34" charset="-122"/>
+                <a:cs typeface="Calibri" pitchFamily="34" charset="-120"/>
+              </a:rPr>
+              <a:t>File upload</a:t>
+            </a:r>
+            <a:endParaRPr lang="en-US" sz="1400" dirty="0"/>
+          </a:p>
+        </p:txBody>
+      </p:sp>
+      <p:sp>
+        <p:nvSpPr>
+          <p:cNvPr id="11" name="Text 9"/>
+          <p:cNvSpPr txBox="1"/>
+          <p:nvPr/>
+        </p:nvSpPr>
+        <p:spPr>
+          <a:xfrm>
+            <a:off x="4809744" y="2057400"/>
+            <a:ext cx="2862072" cy="1545336"/>
+          </a:xfrm>
+          <a:prstGeom prst="rect">
+            <a:avLst/>
+          </a:prstGeom>
+          <a:noFill/>
+          <a:ln/>
+        </p:spPr>
+        <p:txBody>
+          <a:bodyPr wrap="square" lIns="0" tIns="0" rIns="0" bIns="0" rtlCol="0" anchor="t"/>
+          <a:lstStyle/>
+          <a:p>
+            <a:pPr indent="0" marL="0">
+              <a:buNone/>
+            </a:pPr>
+            <a:r>
+              <a:rPr lang="en-US" sz="1050" dirty="0">
+                <a:solidFill>
+                  <a:srgbClr val="5A5A6E"/>
+                </a:solidFill>
+                <a:latin typeface="Calibri" pitchFamily="34" charset="0"/>
+                <a:ea typeface="Calibri" pitchFamily="34" charset="-122"/>
+                <a:cs typeface="Calibri" pitchFamily="34" charset="-120"/>
+              </a:rPr>
+              <a:t>upload_file() — Files API upload (messages_api) or resolved local path (agent_sdk)</a:t>
+            </a:r>
+            <a:endParaRPr lang="en-US" sz="1050" dirty="0"/>
+          </a:p>
+        </p:txBody>
+      </p:sp>
+      <p:sp>
+        <p:nvSpPr>
+          <p:cNvPr id="12" name="Shape 10"/>
+          <p:cNvSpPr/>
+          <p:nvPr/>
+        </p:nvSpPr>
+        <p:spPr>
+          <a:xfrm>
+            <a:off x="8193024" y="1600200"/>
+            <a:ext cx="3502152" cy="2148840"/>
+          </a:xfrm>
+          <a:prstGeom prst="roundRect">
+            <a:avLst>
+              <a:gd name="adj" fmla="val 2128"/>
+            </a:avLst>
+          </a:prstGeom>
+          <a:solidFill>
+            <a:srgbClr val="F5F6FA"/>
+          </a:solidFill>
+          <a:ln/>
+        </p:spPr>
+      </p:sp>
+      <p:sp>
+        <p:nvSpPr>
+          <p:cNvPr id="13" name="Shape 11"/>
+          <p:cNvSpPr/>
+          <p:nvPr/>
+        </p:nvSpPr>
+        <p:spPr>
+          <a:xfrm>
+            <a:off x="8394192" y="1764792"/>
+            <a:ext cx="73152" cy="1819656"/>
+          </a:xfrm>
+          <a:prstGeom prst="roundRect">
+            <a:avLst>
+              <a:gd name="adj" fmla="val 18750"/>
+            </a:avLst>
+          </a:prstGeom>
+          <a:solidFill>
+            <a:srgbClr val="6D2E46"/>
+          </a:solidFill>
+          <a:ln/>
+        </p:spPr>
+      </p:sp>
+      <p:sp>
+        <p:nvSpPr>
+          <p:cNvPr id="14" name="Text 12"/>
+          <p:cNvSpPr txBox="1"/>
+          <p:nvPr/>
+        </p:nvSpPr>
+        <p:spPr>
+          <a:xfrm>
+            <a:off x="8631936" y="1728216"/>
+            <a:ext cx="2862072" cy="320040"/>
+          </a:xfrm>
+          <a:prstGeom prst="rect">
+            <a:avLst/>
+          </a:prstGeom>
+          <a:noFill/>
+          <a:ln/>
+        </p:spPr>
+        <p:txBody>
+          <a:bodyPr wrap="square" lIns="0" tIns="0" rIns="0" bIns="0" rtlCol="0" anchor="ctr"/>
+          <a:lstStyle/>
+          <a:p>
+            <a:pPr indent="0" marL="0">
+              <a:buNone/>
+            </a:pPr>
+            <a:r>
+              <a:rPr lang="en-US" sz="1400" b="1" dirty="0">
+                <a:solidFill>
+                  <a:srgbClr val="1E2761"/>
+                </a:solidFill>
+                <a:latin typeface="Calibri" pitchFamily="34" charset="0"/>
+                <a:ea typeface="Calibri" pitchFamily="34" charset="-122"/>
+                <a:cs typeface="Calibri" pitchFamily="34" charset="-120"/>
+              </a:rPr>
+              <a:t>Session sharing</a:t>
+            </a:r>
+            <a:endParaRPr lang="en-US" sz="1400" dirty="0"/>
+          </a:p>
+        </p:txBody>
+      </p:sp>
+      <p:sp>
+        <p:nvSpPr>
+          <p:cNvPr id="15" name="Text 13"/>
+          <p:cNvSpPr txBox="1"/>
+          <p:nvPr/>
+        </p:nvSpPr>
+        <p:spPr>
+          <a:xfrm>
+            <a:off x="8631936" y="2057400"/>
+            <a:ext cx="2862072" cy="1545336"/>
+          </a:xfrm>
+          <a:prstGeom prst="rect">
+            <a:avLst/>
+          </a:prstGeom>
+          <a:noFill/>
+          <a:ln/>
+        </p:spPr>
+        <p:txBody>
+          <a:bodyPr wrap="square" lIns="0" tIns="0" rIns="0" bIns="0" rtlCol="0" anchor="t"/>
+          <a:lstStyle/>
+          <a:p>
+            <a:pPr indent="0" marL="0">
+              <a:buNone/>
+            </a:pPr>
+            <a:r>
+              <a:rPr lang="en-US" sz="1050" dirty="0">
+                <a:solidFill>
+                  <a:srgbClr val="5A5A6E"/>
+                </a:solidFill>
+                <a:latin typeface="Calibri" pitchFamily="34" charset="0"/>
+                <a:ea typeface="Calibri" pitchFamily="34" charset="-122"/>
+                <a:cs typeface="Calibri" pitchFamily="34" charset="-120"/>
+              </a:rPr>
+              <a:t>context_mode: session shares one live conversation across steps and calls — resume, auto-trim, and session-store mirroring built in</a:t>
+            </a:r>
+            <a:endParaRPr lang="en-US" sz="1050" dirty="0"/>
+          </a:p>
+        </p:txBody>
+      </p:sp>
+      <p:sp>
+        <p:nvSpPr>
+          <p:cNvPr id="16" name="Shape 14"/>
+          <p:cNvSpPr/>
+          <p:nvPr/>
+        </p:nvSpPr>
+        <p:spPr>
+          <a:xfrm>
+            <a:off x="548640" y="4023360"/>
+            <a:ext cx="3502152" cy="2148840"/>
+          </a:xfrm>
+          <a:prstGeom prst="roundRect">
+            <a:avLst>
+              <a:gd name="adj" fmla="val 2128"/>
+            </a:avLst>
+          </a:prstGeom>
+          <a:solidFill>
+            <a:srgbClr val="F5F6FA"/>
+          </a:solidFill>
+          <a:ln/>
+        </p:spPr>
+      </p:sp>
+      <p:sp>
+        <p:nvSpPr>
+          <p:cNvPr id="17" name="Shape 15"/>
+          <p:cNvSpPr/>
+          <p:nvPr/>
+        </p:nvSpPr>
+        <p:spPr>
+          <a:xfrm>
+            <a:off x="749808" y="4187952"/>
+            <a:ext cx="73152" cy="1819656"/>
+          </a:xfrm>
+          <a:prstGeom prst="roundRect">
+            <a:avLst>
+              <a:gd name="adj" fmla="val 18750"/>
+            </a:avLst>
           </a:prstGeom>
           <a:solidFill>
             <a:srgbClr val="2F3C7E"/>
@@ -2423,30 +2674,30 @@
       </p:sp>
       <p:sp>
         <p:nvSpPr>
-          <p:cNvPr id="10" name="Text 8"/>
-          <p:cNvSpPr txBox="1"/>
-          <p:nvPr/>
-        </p:nvSpPr>
-        <p:spPr>
-          <a:xfrm>
-            <a:off x="6720840" y="1536192"/>
-            <a:ext cx="4663440" cy="365760"/>
-          </a:xfrm>
-          <a:prstGeom prst="rect">
-            <a:avLst/>
-          </a:prstGeom>
-          <a:noFill/>
-          <a:ln/>
-        </p:spPr>
-        <p:txBody>
-          <a:bodyPr wrap="square" lIns="0" tIns="0" rIns="0" bIns="0" rtlCol="0" anchor="ctr"/>
-          <a:lstStyle/>
-          <a:p>
-            <a:pPr indent="0" marL="0">
-              <a:buNone/>
-            </a:pPr>
-            <a:r>
-              <a:rPr lang="en-US" sz="1450" b="1" dirty="0">
+          <p:cNvPr id="18" name="Text 16"/>
+          <p:cNvSpPr txBox="1"/>
+          <p:nvPr/>
+        </p:nvSpPr>
+        <p:spPr>
+          <a:xfrm>
+            <a:off x="987552" y="4151376"/>
+            <a:ext cx="2862072" cy="320040"/>
+          </a:xfrm>
+          <a:prstGeom prst="rect">
+            <a:avLst/>
+          </a:prstGeom>
+          <a:noFill/>
+          <a:ln/>
+        </p:spPr>
+        <p:txBody>
+          <a:bodyPr wrap="square" lIns="0" tIns="0" rIns="0" bIns="0" rtlCol="0" anchor="ctr"/>
+          <a:lstStyle/>
+          <a:p>
+            <a:pPr indent="0" marL="0">
+              <a:buNone/>
+            </a:pPr>
+            <a:r>
+              <a:rPr lang="en-US" sz="1400" b="1" dirty="0">
                 <a:solidFill>
                   <a:srgbClr val="1E2761"/>
                 </a:solidFill>
@@ -2454,38 +2705,38 @@
                 <a:ea typeface="Calibri" pitchFamily="34" charset="-122"/>
                 <a:cs typeface="Calibri" pitchFamily="34" charset="-120"/>
               </a:rPr>
-              <a:t>File upload</a:t>
-            </a:r>
-            <a:endParaRPr lang="en-US" sz="1450" dirty="0"/>
-          </a:p>
-        </p:txBody>
-      </p:sp>
-      <p:sp>
-        <p:nvSpPr>
-          <p:cNvPr id="11" name="Text 9"/>
-          <p:cNvSpPr txBox="1"/>
-          <p:nvPr/>
-        </p:nvSpPr>
-        <p:spPr>
-          <a:xfrm>
-            <a:off x="6720840" y="1938528"/>
-            <a:ext cx="4663440" cy="777240"/>
-          </a:xfrm>
-          <a:prstGeom prst="rect">
-            <a:avLst/>
-          </a:prstGeom>
-          <a:noFill/>
-          <a:ln/>
-        </p:spPr>
-        <p:txBody>
-          <a:bodyPr wrap="square" lIns="0" tIns="0" rIns="0" bIns="0" rtlCol="0" anchor="ctr"/>
-          <a:lstStyle/>
-          <a:p>
-            <a:pPr indent="0" marL="0">
-              <a:buNone/>
-            </a:pPr>
-            <a:r>
-              <a:rPr lang="en-US" sz="1150" dirty="0">
+              <a:t>Multi-environment</a:t>
+            </a:r>
+            <a:endParaRPr lang="en-US" sz="1400" dirty="0"/>
+          </a:p>
+        </p:txBody>
+      </p:sp>
+      <p:sp>
+        <p:nvSpPr>
+          <p:cNvPr id="19" name="Text 17"/>
+          <p:cNvSpPr txBox="1"/>
+          <p:nvPr/>
+        </p:nvSpPr>
+        <p:spPr>
+          <a:xfrm>
+            <a:off x="987552" y="4480560"/>
+            <a:ext cx="2862072" cy="1545336"/>
+          </a:xfrm>
+          <a:prstGeom prst="rect">
+            <a:avLst/>
+          </a:prstGeom>
+          <a:noFill/>
+          <a:ln/>
+        </p:spPr>
+        <p:txBody>
+          <a:bodyPr wrap="square" lIns="0" tIns="0" rIns="0" bIns="0" rtlCol="0" anchor="t"/>
+          <a:lstStyle/>
+          <a:p>
+            <a:pPr indent="0" marL="0">
+              <a:buNone/>
+            </a:pPr>
+            <a:r>
+              <a:rPr lang="en-US" sz="1050" dirty="0">
                 <a:solidFill>
                   <a:srgbClr val="5A5A6E"/>
                 </a:solidFill>
@@ -2493,26 +2744,26 @@
                 <a:ea typeface="Calibri" pitchFamily="34" charset="-122"/>
                 <a:cs typeface="Calibri" pitchFamily="34" charset="-120"/>
               </a:rPr>
-              <a:t>upload_file() — Files API upload (messages_api) or resolved local path (agent_sdk)</a:t>
-            </a:r>
-            <a:endParaRPr lang="en-US" sz="1150" dirty="0"/>
-          </a:p>
-        </p:txBody>
-      </p:sp>
-      <p:sp>
-        <p:nvSpPr>
-          <p:cNvPr id="12" name="Shape 10"/>
+              <a:t>"environment": local/dev (OAuth) vs. staging/prod (console API key) — same call shape</a:t>
+            </a:r>
+            <a:endParaRPr lang="en-US" sz="1050" dirty="0"/>
+          </a:p>
+        </p:txBody>
+      </p:sp>
+      <p:sp>
+        <p:nvSpPr>
+          <p:cNvPr id="20" name="Shape 18"/>
           <p:cNvSpPr/>
           <p:nvPr/>
         </p:nvSpPr>
         <p:spPr>
           <a:xfrm>
-            <a:off x="548640" y="2971800"/>
-            <a:ext cx="5394960" cy="1417320"/>
+            <a:off x="4370832" y="4023360"/>
+            <a:ext cx="3502152" cy="2148840"/>
           </a:xfrm>
           <a:prstGeom prst="roundRect">
             <a:avLst>
-              <a:gd name="adj" fmla="val 5161"/>
+              <a:gd name="adj" fmla="val 2128"/>
             </a:avLst>
           </a:prstGeom>
           <a:solidFill>
@@ -2523,116 +2774,118 @@
       </p:sp>
       <p:sp>
         <p:nvSpPr>
-          <p:cNvPr id="13" name="Shape 11"/>
+          <p:cNvPr id="21" name="Shape 19"/>
           <p:cNvSpPr/>
           <p:nvPr/>
         </p:nvSpPr>
         <p:spPr>
           <a:xfrm>
-            <a:off x="777240" y="3172968"/>
-            <a:ext cx="91440" cy="1005840"/>
-          </a:xfrm>
-          <a:prstGeom prst="roundRect">
-            <a:avLst/>
-          </a:prstGeom>
-          <a:solidFill>
-            <a:srgbClr val="028090"/>
-          </a:solidFill>
-          <a:ln/>
-        </p:spPr>
-      </p:sp>
-      <p:sp>
-        <p:nvSpPr>
-          <p:cNvPr id="14" name="Text 12"/>
-          <p:cNvSpPr txBox="1"/>
-          <p:nvPr/>
-        </p:nvSpPr>
-        <p:spPr>
-          <a:xfrm>
-            <a:off x="1051560" y="3136392"/>
-            <a:ext cx="4663440" cy="365760"/>
-          </a:xfrm>
-          <a:prstGeom prst="rect">
-            <a:avLst/>
-          </a:prstGeom>
-          <a:noFill/>
-          <a:ln/>
-        </p:spPr>
-        <p:txBody>
-          <a:bodyPr wrap="square" lIns="0" tIns="0" rIns="0" bIns="0" rtlCol="0" anchor="ctr"/>
-          <a:lstStyle/>
-          <a:p>
-            <a:pPr indent="0" marL="0">
-              <a:buNone/>
-            </a:pPr>
-            <a:r>
-              <a:rPr lang="en-US" sz="1450" b="1" dirty="0">
-                <a:solidFill>
-                  <a:srgbClr val="1E2761"/>
-                </a:solidFill>
-                <a:latin typeface="Calibri" pitchFamily="34" charset="0"/>
-                <a:ea typeface="Calibri" pitchFamily="34" charset="-122"/>
-                <a:cs typeface="Calibri" pitchFamily="34" charset="-120"/>
-              </a:rPr>
-              <a:t>Multi-environment</a:t>
-            </a:r>
-            <a:endParaRPr lang="en-US" sz="1450" dirty="0"/>
-          </a:p>
-        </p:txBody>
-      </p:sp>
-      <p:sp>
-        <p:nvSpPr>
-          <p:cNvPr id="15" name="Text 13"/>
-          <p:cNvSpPr txBox="1"/>
-          <p:nvPr/>
-        </p:nvSpPr>
-        <p:spPr>
-          <a:xfrm>
-            <a:off x="1051560" y="3538728"/>
-            <a:ext cx="4663440" cy="777240"/>
-          </a:xfrm>
-          <a:prstGeom prst="rect">
-            <a:avLst/>
-          </a:prstGeom>
-          <a:noFill/>
-          <a:ln/>
-        </p:spPr>
-        <p:txBody>
-          <a:bodyPr wrap="square" lIns="0" tIns="0" rIns="0" bIns="0" rtlCol="0" anchor="ctr"/>
-          <a:lstStyle/>
-          <a:p>
-            <a:pPr indent="0" marL="0">
-              <a:buNone/>
-            </a:pPr>
-            <a:r>
-              <a:rPr lang="en-US" sz="1150" dirty="0">
-                <a:solidFill>
-                  <a:srgbClr val="5A5A6E"/>
-                </a:solidFill>
-                <a:latin typeface="Calibri" pitchFamily="34" charset="0"/>
-                <a:ea typeface="Calibri" pitchFamily="34" charset="-122"/>
-                <a:cs typeface="Calibri" pitchFamily="34" charset="-120"/>
-              </a:rPr>
-              <a:t>"environment": local/dev (OAuth) vs. staging/prod (console API key) — same call shape</a:t>
-            </a:r>
-            <a:endParaRPr lang="en-US" sz="1150" dirty="0"/>
-          </a:p>
-        </p:txBody>
-      </p:sp>
-      <p:sp>
-        <p:nvSpPr>
-          <p:cNvPr id="16" name="Shape 14"/>
-          <p:cNvSpPr/>
-          <p:nvPr/>
-        </p:nvSpPr>
-        <p:spPr>
-          <a:xfrm>
-            <a:off x="6217920" y="2971800"/>
-            <a:ext cx="5394960" cy="1417320"/>
+            <a:off x="4572000" y="4187952"/>
+            <a:ext cx="73152" cy="1819656"/>
           </a:xfrm>
           <a:prstGeom prst="roundRect">
             <a:avLst>
-              <a:gd name="adj" fmla="val 5161"/>
+              <a:gd name="adj" fmla="val 18750"/>
+            </a:avLst>
+          </a:prstGeom>
+          <a:solidFill>
+            <a:srgbClr val="B85042"/>
+          </a:solidFill>
+          <a:ln/>
+        </p:spPr>
+      </p:sp>
+      <p:sp>
+        <p:nvSpPr>
+          <p:cNvPr id="22" name="Text 20"/>
+          <p:cNvSpPr txBox="1"/>
+          <p:nvPr/>
+        </p:nvSpPr>
+        <p:spPr>
+          <a:xfrm>
+            <a:off x="4809744" y="4151376"/>
+            <a:ext cx="2862072" cy="320040"/>
+          </a:xfrm>
+          <a:prstGeom prst="rect">
+            <a:avLst/>
+          </a:prstGeom>
+          <a:noFill/>
+          <a:ln/>
+        </p:spPr>
+        <p:txBody>
+          <a:bodyPr wrap="square" lIns="0" tIns="0" rIns="0" bIns="0" rtlCol="0" anchor="ctr"/>
+          <a:lstStyle/>
+          <a:p>
+            <a:pPr indent="0" marL="0">
+              <a:buNone/>
+            </a:pPr>
+            <a:r>
+              <a:rPr lang="en-US" sz="1400" b="1" dirty="0">
+                <a:solidFill>
+                  <a:srgbClr val="1E2761"/>
+                </a:solidFill>
+                <a:latin typeface="Calibri" pitchFamily="34" charset="0"/>
+                <a:ea typeface="Calibri" pitchFamily="34" charset="-122"/>
+                <a:cs typeface="Calibri" pitchFamily="34" charset="-120"/>
+              </a:rPr>
+              <a:t>Per-step model config</a:t>
+            </a:r>
+            <a:endParaRPr lang="en-US" sz="1400" dirty="0"/>
+          </a:p>
+        </p:txBody>
+      </p:sp>
+      <p:sp>
+        <p:nvSpPr>
+          <p:cNvPr id="23" name="Text 21"/>
+          <p:cNvSpPr txBox="1"/>
+          <p:nvPr/>
+        </p:nvSpPr>
+        <p:spPr>
+          <a:xfrm>
+            <a:off x="4809744" y="4480560"/>
+            <a:ext cx="2862072" cy="1545336"/>
+          </a:xfrm>
+          <a:prstGeom prst="rect">
+            <a:avLst/>
+          </a:prstGeom>
+          <a:noFill/>
+          <a:ln/>
+        </p:spPr>
+        <p:txBody>
+          <a:bodyPr wrap="square" lIns="0" tIns="0" rIns="0" bIns="0" rtlCol="0" anchor="t"/>
+          <a:lstStyle/>
+          <a:p>
+            <a:pPr indent="0" marL="0">
+              <a:buNone/>
+            </a:pPr>
+            <a:r>
+              <a:rPr lang="en-US" sz="1050" dirty="0">
+                <a:solidFill>
+                  <a:srgbClr val="5A5A6E"/>
+                </a:solidFill>
+                <a:latin typeface="Calibri" pitchFamily="34" charset="0"/>
+                <a:ea typeface="Calibri" pitchFamily="34" charset="-122"/>
+                <a:cs typeface="Calibri" pitchFamily="34" charset="-120"/>
+              </a:rPr>
+              <a:t>max_turns, thinking, temperature, top_p — pass through with no accelerator code change</a:t>
+            </a:r>
+            <a:endParaRPr lang="en-US" sz="1050" dirty="0"/>
+          </a:p>
+        </p:txBody>
+      </p:sp>
+      <p:sp>
+        <p:nvSpPr>
+          <p:cNvPr id="24" name="Shape 22"/>
+          <p:cNvSpPr/>
+          <p:nvPr/>
+        </p:nvSpPr>
+        <p:spPr>
+          <a:xfrm>
+            <a:off x="8193024" y="4023360"/>
+            <a:ext cx="3502152" cy="2148840"/>
+          </a:xfrm>
+          <a:prstGeom prst="roundRect">
+            <a:avLst>
+              <a:gd name="adj" fmla="val 2128"/>
             </a:avLst>
           </a:prstGeom>
           <a:solidFill>
@@ -2643,50 +2896,52 @@
       </p:sp>
       <p:sp>
         <p:nvSpPr>
-          <p:cNvPr id="17" name="Shape 15"/>
+          <p:cNvPr id="25" name="Shape 23"/>
           <p:cNvSpPr/>
           <p:nvPr/>
         </p:nvSpPr>
         <p:spPr>
           <a:xfrm>
-            <a:off x="6446520" y="3172968"/>
-            <a:ext cx="91440" cy="1005840"/>
+            <a:off x="8394192" y="4187952"/>
+            <a:ext cx="73152" cy="1819656"/>
           </a:xfrm>
           <a:prstGeom prst="roundRect">
-            <a:avLst/>
+            <a:avLst>
+              <a:gd name="adj" fmla="val 18750"/>
+            </a:avLst>
           </a:prstGeom>
           <a:solidFill>
-            <a:srgbClr val="6D2E46"/>
+            <a:srgbClr val="21295C"/>
           </a:solidFill>
           <a:ln/>
         </p:spPr>
       </p:sp>
       <p:sp>
         <p:nvSpPr>
-          <p:cNvPr id="18" name="Text 16"/>
-          <p:cNvSpPr txBox="1"/>
-          <p:nvPr/>
-        </p:nvSpPr>
-        <p:spPr>
-          <a:xfrm>
-            <a:off x="6720840" y="3136392"/>
-            <a:ext cx="4663440" cy="365760"/>
-          </a:xfrm>
-          <a:prstGeom prst="rect">
-            <a:avLst/>
-          </a:prstGeom>
-          <a:noFill/>
-          <a:ln/>
-        </p:spPr>
-        <p:txBody>
-          <a:bodyPr wrap="square" lIns="0" tIns="0" rIns="0" bIns="0" rtlCol="0" anchor="ctr"/>
-          <a:lstStyle/>
-          <a:p>
-            <a:pPr indent="0" marL="0">
-              <a:buNone/>
-            </a:pPr>
-            <a:r>
-              <a:rPr lang="en-US" sz="1450" b="1" dirty="0">
+          <p:cNvPr id="26" name="Text 24"/>
+          <p:cNvSpPr txBox="1"/>
+          <p:nvPr/>
+        </p:nvSpPr>
+        <p:spPr>
+          <a:xfrm>
+            <a:off x="8631936" y="4151376"/>
+            <a:ext cx="2862072" cy="320040"/>
+          </a:xfrm>
+          <a:prstGeom prst="rect">
+            <a:avLst/>
+          </a:prstGeom>
+          <a:noFill/>
+          <a:ln/>
+        </p:spPr>
+        <p:txBody>
+          <a:bodyPr wrap="square" lIns="0" tIns="0" rIns="0" bIns="0" rtlCol="0" anchor="ctr"/>
+          <a:lstStyle/>
+          <a:p>
+            <a:pPr indent="0" marL="0">
+              <a:buNone/>
+            </a:pPr>
+            <a:r>
+              <a:rPr lang="en-US" sz="1400" b="1" dirty="0">
                 <a:solidFill>
                   <a:srgbClr val="1E2761"/>
                 </a:solidFill>
@@ -2694,38 +2949,38 @@
                 <a:ea typeface="Calibri" pitchFamily="34" charset="-122"/>
                 <a:cs typeface="Calibri" pitchFamily="34" charset="-120"/>
               </a:rPr>
-              <a:t>Per-step model config</a:t>
-            </a:r>
-            <a:endParaRPr lang="en-US" sz="1450" dirty="0"/>
-          </a:p>
-        </p:txBody>
-      </p:sp>
-      <p:sp>
-        <p:nvSpPr>
-          <p:cNvPr id="19" name="Text 17"/>
-          <p:cNvSpPr txBox="1"/>
-          <p:nvPr/>
-        </p:nvSpPr>
-        <p:spPr>
-          <a:xfrm>
-            <a:off x="6720840" y="3538728"/>
-            <a:ext cx="4663440" cy="777240"/>
-          </a:xfrm>
-          <a:prstGeom prst="rect">
-            <a:avLst/>
-          </a:prstGeom>
-          <a:noFill/>
-          <a:ln/>
-        </p:spPr>
-        <p:txBody>
-          <a:bodyPr wrap="square" lIns="0" tIns="0" rIns="0" bIns="0" rtlCol="0" anchor="ctr"/>
-          <a:lstStyle/>
-          <a:p>
-            <a:pPr indent="0" marL="0">
-              <a:buNone/>
-            </a:pPr>
-            <a:r>
-              <a:rPr lang="en-US" sz="1150" dirty="0">
+              <a:t>Parallel processing</a:t>
+            </a:r>
+            <a:endParaRPr lang="en-US" sz="1400" dirty="0"/>
+          </a:p>
+        </p:txBody>
+      </p:sp>
+      <p:sp>
+        <p:nvSpPr>
+          <p:cNvPr id="27" name="Text 25"/>
+          <p:cNvSpPr txBox="1"/>
+          <p:nvPr/>
+        </p:nvSpPr>
+        <p:spPr>
+          <a:xfrm>
+            <a:off x="8631936" y="4480560"/>
+            <a:ext cx="2862072" cy="1545336"/>
+          </a:xfrm>
+          <a:prstGeom prst="rect">
+            <a:avLst/>
+          </a:prstGeom>
+          <a:noFill/>
+          <a:ln/>
+        </p:spPr>
+        <p:txBody>
+          <a:bodyPr wrap="square" lIns="0" tIns="0" rIns="0" bIns="0" rtlCol="0" anchor="t"/>
+          <a:lstStyle/>
+          <a:p>
+            <a:pPr indent="0" marL="0">
+              <a:buNone/>
+            </a:pPr>
+            <a:r>
+              <a:rPr lang="en-US" sz="1050" dirty="0">
                 <a:solidFill>
                   <a:srgbClr val="5A5A6E"/>
                 </a:solidFill>
@@ -2733,9 +2988,9 @@
                 <a:ea typeface="Calibri" pitchFamily="34" charset="-122"/>
                 <a:cs typeface="Calibri" pitchFamily="34" charset="-120"/>
               </a:rPr>
-              <a:t>max_turns, thinking, temperature, top_p — pass through with no accelerator code change</a:t>
-            </a:r>
-            <a:endParaRPr lang="en-US" sz="1150" dirty="0"/>
+              <a:t>parallel_processing: true runs multiple steps concurrently, then auto-synthesizes the results into one output</a:t>
+            </a:r>
+            <a:endParaRPr lang="en-US" sz="1050" dirty="0"/>
           </a:p>
         </p:txBody>
       </p:sp>
@@ -5004,6 +5259,1800 @@
               <a:t>github.com/sandeeppachauri/claude-orchestration-accelerator</a:t>
             </a:r>
             <a:endParaRPr lang="en-US" sz="1500" dirty="0"/>
+          </a:p>
+        </p:txBody>
+      </p:sp>
+    </p:spTree>
+  </p:cSld>
+  <p:clrMapOvr>
+    <a:masterClrMapping/>
+  </p:clrMapOvr>
+</p:sld>
+</file>
+
+<file path=ppt/slides/slide15.xml><?xml version="1.0" encoding="utf-8"?>
+<p:sld xmlns:a="http://schemas.openxmlformats.org/drawingml/2006/main" xmlns:r="http://schemas.openxmlformats.org/officeDocument/2006/relationships" xmlns:p="http://schemas.openxmlformats.org/presentationml/2006/main">
+  <p:cSld name="Slide 1">
+    <p:bg>
+      <p:bgPr>
+        <a:solidFill>
+          <a:srgbClr val="FFFFFF"/>
+        </a:solidFill>
+      </p:bgPr>
+    </p:bg>
+    <p:spTree>
+      <p:nvGrpSpPr>
+        <p:cNvPr id="1" name=""/>
+        <p:cNvGrpSpPr/>
+        <p:nvPr/>
+      </p:nvGrpSpPr>
+      <p:grpSpPr>
+        <a:xfrm>
+          <a:off x="0" y="0"/>
+          <a:ext cx="0" cy="0"/>
+          <a:chOff x="0" y="0"/>
+          <a:chExt cx="0" cy="0"/>
+        </a:xfrm>
+      </p:grpSpPr>
+      <p:sp>
+        <p:nvSpPr>
+          <p:cNvPr id="2" name="Text 0"/>
+          <p:cNvSpPr txBox="1"/>
+          <p:nvPr/>
+        </p:nvSpPr>
+        <p:spPr>
+          <a:xfrm>
+            <a:off x="548640" y="292608"/>
+            <a:ext cx="10972800" cy="320040"/>
+          </a:xfrm>
+          <a:prstGeom prst="rect">
+            <a:avLst/>
+          </a:prstGeom>
+          <a:noFill/>
+          <a:ln/>
+        </p:spPr>
+        <p:txBody>
+          <a:bodyPr wrap="square" lIns="0" tIns="0" rIns="0" bIns="0" rtlCol="0" anchor="ctr"/>
+          <a:lstStyle/>
+          <a:p>
+            <a:pPr indent="0" marL="0">
+              <a:buNone/>
+            </a:pPr>
+            <a:r>
+              <a:rPr lang="en-US" sz="1200" b="1" dirty="0">
+                <a:solidFill>
+                  <a:srgbClr val="028090"/>
+                </a:solidFill>
+                <a:latin typeface="Calibri" pitchFamily="34" charset="0"/>
+                <a:ea typeface="Calibri" pitchFamily="34" charset="-122"/>
+                <a:cs typeface="Calibri" pitchFamily="34" charset="-120"/>
+              </a:rPr>
+              <a:t>KEY CAPABILITIES</a:t>
+            </a:r>
+            <a:endParaRPr lang="en-US" sz="1200" dirty="0"/>
+          </a:p>
+        </p:txBody>
+      </p:sp>
+      <p:sp>
+        <p:nvSpPr>
+          <p:cNvPr id="3" name="Text 1"/>
+          <p:cNvSpPr txBox="1"/>
+          <p:nvPr/>
+        </p:nvSpPr>
+        <p:spPr>
+          <a:xfrm>
+            <a:off x="548640" y="566928"/>
+            <a:ext cx="10972800" cy="731520"/>
+          </a:xfrm>
+          <a:prstGeom prst="rect">
+            <a:avLst/>
+          </a:prstGeom>
+          <a:noFill/>
+          <a:ln/>
+        </p:spPr>
+        <p:txBody>
+          <a:bodyPr wrap="square" lIns="0" tIns="0" rIns="0" bIns="0" rtlCol="0" anchor="ctr"/>
+          <a:lstStyle/>
+          <a:p>
+            <a:pPr indent="0" marL="0">
+              <a:buNone/>
+            </a:pPr>
+            <a:r>
+              <a:rPr lang="en-US" sz="3000" b="1" dirty="0">
+                <a:solidFill>
+                  <a:srgbClr val="1E2761"/>
+                </a:solidFill>
+                <a:latin typeface="Cambria" pitchFamily="34" charset="0"/>
+                <a:ea typeface="Cambria" pitchFamily="34" charset="-122"/>
+                <a:cs typeface="Cambria" pitchFamily="34" charset="-120"/>
+              </a:rPr>
+              <a:t>Conversation, Concurrency &amp; Real-Time Output</a:t>
+            </a:r>
+            <a:endParaRPr lang="en-US" sz="3000" dirty="0"/>
+          </a:p>
+        </p:txBody>
+      </p:sp>
+      <p:sp>
+        <p:nvSpPr>
+          <p:cNvPr id="4" name="Shape 2"/>
+          <p:cNvSpPr/>
+          <p:nvPr/>
+        </p:nvSpPr>
+        <p:spPr>
+          <a:xfrm>
+            <a:off x="548640" y="1600200"/>
+            <a:ext cx="5257800" cy="2286000"/>
+          </a:xfrm>
+          <a:prstGeom prst="roundRect">
+            <a:avLst>
+              <a:gd name="adj" fmla="val 2400"/>
+            </a:avLst>
+          </a:prstGeom>
+          <a:solidFill>
+            <a:srgbClr val="F5F6FA"/>
+          </a:solidFill>
+          <a:ln/>
+        </p:spPr>
+      </p:sp>
+      <p:sp>
+        <p:nvSpPr>
+          <p:cNvPr id="5" name="Shape 3"/>
+          <p:cNvSpPr/>
+          <p:nvPr/>
+        </p:nvSpPr>
+        <p:spPr>
+          <a:xfrm>
+            <a:off x="777240" y="1801368"/>
+            <a:ext cx="91440" cy="1883664"/>
+          </a:xfrm>
+          <a:prstGeom prst="roundRect">
+            <a:avLst>
+              <a:gd name="adj" fmla="val 20000"/>
+            </a:avLst>
+          </a:prstGeom>
+          <a:solidFill>
+            <a:srgbClr val="990011"/>
+          </a:solidFill>
+          <a:ln/>
+        </p:spPr>
+      </p:sp>
+      <p:sp>
+        <p:nvSpPr>
+          <p:cNvPr id="6" name="Text 4"/>
+          <p:cNvSpPr txBox="1"/>
+          <p:nvPr/>
+        </p:nvSpPr>
+        <p:spPr>
+          <a:xfrm>
+            <a:off x="1051560" y="1764792"/>
+            <a:ext cx="4526280" cy="365760"/>
+          </a:xfrm>
+          <a:prstGeom prst="rect">
+            <a:avLst/>
+          </a:prstGeom>
+          <a:noFill/>
+          <a:ln/>
+        </p:spPr>
+        <p:txBody>
+          <a:bodyPr wrap="square" lIns="0" tIns="0" rIns="0" bIns="0" rtlCol="0" anchor="ctr"/>
+          <a:lstStyle/>
+          <a:p>
+            <a:pPr indent="0" marL="0">
+              <a:buNone/>
+            </a:pPr>
+            <a:r>
+              <a:rPr lang="en-US" sz="1550" b="1" dirty="0">
+                <a:solidFill>
+                  <a:srgbClr val="1E2761"/>
+                </a:solidFill>
+                <a:latin typeface="Calibri" pitchFamily="34" charset="0"/>
+                <a:ea typeface="Calibri" pitchFamily="34" charset="-122"/>
+                <a:cs typeface="Calibri" pitchFamily="34" charset="-120"/>
+              </a:rPr>
+              <a:t>🧠 True multi-turn sessions</a:t>
+            </a:r>
+            <a:endParaRPr lang="en-US" sz="1550" dirty="0"/>
+          </a:p>
+        </p:txBody>
+      </p:sp>
+      <p:sp>
+        <p:nvSpPr>
+          <p:cNvPr id="7" name="Text 5"/>
+          <p:cNvSpPr txBox="1"/>
+          <p:nvPr/>
+        </p:nvSpPr>
+        <p:spPr>
+          <a:xfrm>
+            <a:off x="1051560" y="2130552"/>
+            <a:ext cx="4526280" cy="1572768"/>
+          </a:xfrm>
+          <a:prstGeom prst="rect">
+            <a:avLst/>
+          </a:prstGeom>
+          <a:noFill/>
+          <a:ln/>
+        </p:spPr>
+        <p:txBody>
+          <a:bodyPr wrap="square" lIns="0" tIns="0" rIns="0" bIns="0" rtlCol="0" anchor="t"/>
+          <a:lstStyle/>
+          <a:p>
+            <a:pPr indent="0" marL="0">
+              <a:buNone/>
+            </a:pPr>
+            <a:r>
+              <a:rPr lang="en-US" sz="1150" dirty="0">
+                <a:solidFill>
+                  <a:srgbClr val="5A5A6E"/>
+                </a:solidFill>
+                <a:latin typeface="Calibri" pitchFamily="34" charset="0"/>
+                <a:ea typeface="Calibri" pitchFamily="34" charset="-122"/>
+                <a:cs typeface="Calibri" pitchFamily="34" charset="-120"/>
+              </a:rPr>
+              <a:t>context_mode: session keeps a live conversation accumulating across steps and calls, with resume and auto-trimming built in.</a:t>
+            </a:r>
+            <a:endParaRPr lang="en-US" sz="1150" dirty="0"/>
+          </a:p>
+        </p:txBody>
+      </p:sp>
+      <p:sp>
+        <p:nvSpPr>
+          <p:cNvPr id="8" name="Shape 6"/>
+          <p:cNvSpPr/>
+          <p:nvPr/>
+        </p:nvSpPr>
+        <p:spPr>
+          <a:xfrm>
+            <a:off x="6263640" y="1600200"/>
+            <a:ext cx="5257800" cy="2286000"/>
+          </a:xfrm>
+          <a:prstGeom prst="roundRect">
+            <a:avLst>
+              <a:gd name="adj" fmla="val 2400"/>
+            </a:avLst>
+          </a:prstGeom>
+          <a:solidFill>
+            <a:srgbClr val="F5F6FA"/>
+          </a:solidFill>
+          <a:ln/>
+        </p:spPr>
+      </p:sp>
+      <p:sp>
+        <p:nvSpPr>
+          <p:cNvPr id="9" name="Shape 7"/>
+          <p:cNvSpPr/>
+          <p:nvPr/>
+        </p:nvSpPr>
+        <p:spPr>
+          <a:xfrm>
+            <a:off x="6492240" y="1801368"/>
+            <a:ext cx="91440" cy="1883664"/>
+          </a:xfrm>
+          <a:prstGeom prst="roundRect">
+            <a:avLst>
+              <a:gd name="adj" fmla="val 20000"/>
+            </a:avLst>
+          </a:prstGeom>
+          <a:solidFill>
+            <a:srgbClr val="028090"/>
+          </a:solidFill>
+          <a:ln/>
+        </p:spPr>
+      </p:sp>
+      <p:sp>
+        <p:nvSpPr>
+          <p:cNvPr id="10" name="Text 8"/>
+          <p:cNvSpPr txBox="1"/>
+          <p:nvPr/>
+        </p:nvSpPr>
+        <p:spPr>
+          <a:xfrm>
+            <a:off x="6766560" y="1764792"/>
+            <a:ext cx="4526280" cy="365760"/>
+          </a:xfrm>
+          <a:prstGeom prst="rect">
+            <a:avLst/>
+          </a:prstGeom>
+          <a:noFill/>
+          <a:ln/>
+        </p:spPr>
+        <p:txBody>
+          <a:bodyPr wrap="square" lIns="0" tIns="0" rIns="0" bIns="0" rtlCol="0" anchor="ctr"/>
+          <a:lstStyle/>
+          <a:p>
+            <a:pPr indent="0" marL="0">
+              <a:buNone/>
+            </a:pPr>
+            <a:r>
+              <a:rPr lang="en-US" sz="1550" b="1" dirty="0">
+                <a:solidFill>
+                  <a:srgbClr val="1E2761"/>
+                </a:solidFill>
+                <a:latin typeface="Calibri" pitchFamily="34" charset="0"/>
+                <a:ea typeface="Calibri" pitchFamily="34" charset="-122"/>
+                <a:cs typeface="Calibri" pitchFamily="34" charset="-120"/>
+              </a:rPr>
+              <a:t>⚡ Parallel step execution</a:t>
+            </a:r>
+            <a:endParaRPr lang="en-US" sz="1550" dirty="0"/>
+          </a:p>
+        </p:txBody>
+      </p:sp>
+      <p:sp>
+        <p:nvSpPr>
+          <p:cNvPr id="11" name="Text 9"/>
+          <p:cNvSpPr txBox="1"/>
+          <p:nvPr/>
+        </p:nvSpPr>
+        <p:spPr>
+          <a:xfrm>
+            <a:off x="6766560" y="2130552"/>
+            <a:ext cx="4526280" cy="1572768"/>
+          </a:xfrm>
+          <a:prstGeom prst="rect">
+            <a:avLst/>
+          </a:prstGeom>
+          <a:noFill/>
+          <a:ln/>
+        </p:spPr>
+        <p:txBody>
+          <a:bodyPr wrap="square" lIns="0" tIns="0" rIns="0" bIns="0" rtlCol="0" anchor="t"/>
+          <a:lstStyle/>
+          <a:p>
+            <a:pPr indent="0" marL="0">
+              <a:buNone/>
+            </a:pPr>
+            <a:r>
+              <a:rPr lang="en-US" sz="1150" dirty="0">
+                <a:solidFill>
+                  <a:srgbClr val="5A5A6E"/>
+                </a:solidFill>
+                <a:latin typeface="Calibri" pitchFamily="34" charset="0"/>
+                <a:ea typeface="Calibri" pitchFamily="34" charset="-122"/>
+                <a:cs typeface="Calibri" pitchFamily="34" charset="-120"/>
+              </a:rPr>
+              <a:t>Run multiple steps concurrently, then auto-synthesize the results into one output via a dedicated synthesis step.</a:t>
+            </a:r>
+            <a:endParaRPr lang="en-US" sz="1150" dirty="0"/>
+          </a:p>
+        </p:txBody>
+      </p:sp>
+      <p:sp>
+        <p:nvSpPr>
+          <p:cNvPr id="12" name="Shape 10"/>
+          <p:cNvSpPr/>
+          <p:nvPr/>
+        </p:nvSpPr>
+        <p:spPr>
+          <a:xfrm>
+            <a:off x="548640" y="4206240"/>
+            <a:ext cx="5257800" cy="2286000"/>
+          </a:xfrm>
+          <a:prstGeom prst="roundRect">
+            <a:avLst>
+              <a:gd name="adj" fmla="val 2400"/>
+            </a:avLst>
+          </a:prstGeom>
+          <a:solidFill>
+            <a:srgbClr val="F5F6FA"/>
+          </a:solidFill>
+          <a:ln/>
+        </p:spPr>
+      </p:sp>
+      <p:sp>
+        <p:nvSpPr>
+          <p:cNvPr id="13" name="Shape 11"/>
+          <p:cNvSpPr/>
+          <p:nvPr/>
+        </p:nvSpPr>
+        <p:spPr>
+          <a:xfrm>
+            <a:off x="777240" y="4407408"/>
+            <a:ext cx="91440" cy="1883664"/>
+          </a:xfrm>
+          <a:prstGeom prst="roundRect">
+            <a:avLst>
+              <a:gd name="adj" fmla="val 20000"/>
+            </a:avLst>
+          </a:prstGeom>
+          <a:solidFill>
+            <a:srgbClr val="2F3C7E"/>
+          </a:solidFill>
+          <a:ln/>
+        </p:spPr>
+      </p:sp>
+      <p:sp>
+        <p:nvSpPr>
+          <p:cNvPr id="14" name="Text 12"/>
+          <p:cNvSpPr txBox="1"/>
+          <p:nvPr/>
+        </p:nvSpPr>
+        <p:spPr>
+          <a:xfrm>
+            <a:off x="1051560" y="4370832"/>
+            <a:ext cx="4526280" cy="365760"/>
+          </a:xfrm>
+          <a:prstGeom prst="rect">
+            <a:avLst/>
+          </a:prstGeom>
+          <a:noFill/>
+          <a:ln/>
+        </p:spPr>
+        <p:txBody>
+          <a:bodyPr wrap="square" lIns="0" tIns="0" rIns="0" bIns="0" rtlCol="0" anchor="ctr"/>
+          <a:lstStyle/>
+          <a:p>
+            <a:pPr indent="0" marL="0">
+              <a:buNone/>
+            </a:pPr>
+            <a:r>
+              <a:rPr lang="en-US" sz="1550" b="1" dirty="0">
+                <a:solidFill>
+                  <a:srgbClr val="1E2761"/>
+                </a:solidFill>
+                <a:latin typeface="Calibri" pitchFamily="34" charset="0"/>
+                <a:ea typeface="Calibri" pitchFamily="34" charset="-122"/>
+                <a:cs typeface="Calibri" pitchFamily="34" charset="-120"/>
+              </a:rPr>
+              <a:t>📡 Real-time streaming</a:t>
+            </a:r>
+            <a:endParaRPr lang="en-US" sz="1550" dirty="0"/>
+          </a:p>
+        </p:txBody>
+      </p:sp>
+      <p:sp>
+        <p:nvSpPr>
+          <p:cNvPr id="15" name="Text 13"/>
+          <p:cNvSpPr txBox="1"/>
+          <p:nvPr/>
+        </p:nvSpPr>
+        <p:spPr>
+          <a:xfrm>
+            <a:off x="1051560" y="4736592"/>
+            <a:ext cx="4526280" cy="1572768"/>
+          </a:xfrm>
+          <a:prstGeom prst="rect">
+            <a:avLst/>
+          </a:prstGeom>
+          <a:noFill/>
+          <a:ln/>
+        </p:spPr>
+        <p:txBody>
+          <a:bodyPr wrap="square" lIns="0" tIns="0" rIns="0" bIns="0" rtlCol="0" anchor="t"/>
+          <a:lstStyle/>
+          <a:p>
+            <a:pPr indent="0" marL="0">
+              <a:buNone/>
+            </a:pPr>
+            <a:r>
+              <a:rPr lang="en-US" sz="1150" dirty="0">
+                <a:solidFill>
+                  <a:srgbClr val="5A5A6E"/>
+                </a:solidFill>
+                <a:latin typeface="Calibri" pitchFamily="34" charset="0"/>
+                <a:ea typeface="Calibri" pitchFamily="34" charset="-122"/>
+                <a:cs typeface="Calibri" pitchFamily="34" charset="-120"/>
+              </a:rPr>
+              <a:t>stream: true plus an on_chunk callback delivers token-by-token responses on both the Agent SDK and Messages API backends.</a:t>
+            </a:r>
+            <a:endParaRPr lang="en-US" sz="1150" dirty="0"/>
+          </a:p>
+        </p:txBody>
+      </p:sp>
+      <p:sp>
+        <p:nvSpPr>
+          <p:cNvPr id="16" name="Shape 14"/>
+          <p:cNvSpPr/>
+          <p:nvPr/>
+        </p:nvSpPr>
+        <p:spPr>
+          <a:xfrm>
+            <a:off x="6263640" y="4206240"/>
+            <a:ext cx="5257800" cy="2286000"/>
+          </a:xfrm>
+          <a:prstGeom prst="roundRect">
+            <a:avLst>
+              <a:gd name="adj" fmla="val 2400"/>
+            </a:avLst>
+          </a:prstGeom>
+          <a:solidFill>
+            <a:srgbClr val="F5F6FA"/>
+          </a:solidFill>
+          <a:ln/>
+        </p:spPr>
+      </p:sp>
+      <p:sp>
+        <p:nvSpPr>
+          <p:cNvPr id="17" name="Shape 15"/>
+          <p:cNvSpPr/>
+          <p:nvPr/>
+        </p:nvSpPr>
+        <p:spPr>
+          <a:xfrm>
+            <a:off x="6492240" y="4407408"/>
+            <a:ext cx="91440" cy="1883664"/>
+          </a:xfrm>
+          <a:prstGeom prst="roundRect">
+            <a:avLst>
+              <a:gd name="adj" fmla="val 20000"/>
+            </a:avLst>
+          </a:prstGeom>
+          <a:solidFill>
+            <a:srgbClr val="B85042"/>
+          </a:solidFill>
+          <a:ln/>
+        </p:spPr>
+      </p:sp>
+      <p:sp>
+        <p:nvSpPr>
+          <p:cNvPr id="18" name="Text 16"/>
+          <p:cNvSpPr txBox="1"/>
+          <p:nvPr/>
+        </p:nvSpPr>
+        <p:spPr>
+          <a:xfrm>
+            <a:off x="6766560" y="4370832"/>
+            <a:ext cx="4526280" cy="365760"/>
+          </a:xfrm>
+          <a:prstGeom prst="rect">
+            <a:avLst/>
+          </a:prstGeom>
+          <a:noFill/>
+          <a:ln/>
+        </p:spPr>
+        <p:txBody>
+          <a:bodyPr wrap="square" lIns="0" tIns="0" rIns="0" bIns="0" rtlCol="0" anchor="ctr"/>
+          <a:lstStyle/>
+          <a:p>
+            <a:pPr indent="0" marL="0">
+              <a:buNone/>
+            </a:pPr>
+            <a:r>
+              <a:rPr lang="en-US" sz="1550" b="1" dirty="0">
+                <a:solidFill>
+                  <a:srgbClr val="1E2761"/>
+                </a:solidFill>
+                <a:latin typeface="Calibri" pitchFamily="34" charset="0"/>
+                <a:ea typeface="Calibri" pitchFamily="34" charset="-122"/>
+                <a:cs typeface="Calibri" pitchFamily="34" charset="-120"/>
+              </a:rPr>
+              <a:t>🔗 Steps that build on steps</a:t>
+            </a:r>
+            <a:endParaRPr lang="en-US" sz="1550" dirty="0"/>
+          </a:p>
+        </p:txBody>
+      </p:sp>
+      <p:sp>
+        <p:nvSpPr>
+          <p:cNvPr id="19" name="Text 17"/>
+          <p:cNvSpPr txBox="1"/>
+          <p:nvPr/>
+        </p:nvSpPr>
+        <p:spPr>
+          <a:xfrm>
+            <a:off x="6766560" y="4736592"/>
+            <a:ext cx="4526280" cy="1572768"/>
+          </a:xfrm>
+          <a:prstGeom prst="rect">
+            <a:avLst/>
+          </a:prstGeom>
+          <a:noFill/>
+          <a:ln/>
+        </p:spPr>
+        <p:txBody>
+          <a:bodyPr wrap="square" lIns="0" tIns="0" rIns="0" bIns="0" rtlCol="0" anchor="t"/>
+          <a:lstStyle/>
+          <a:p>
+            <a:pPr indent="0" marL="0">
+              <a:buNone/>
+            </a:pPr>
+            <a:r>
+              <a:rPr lang="en-US" sz="1150" dirty="0">
+                <a:solidFill>
+                  <a:srgbClr val="5A5A6E"/>
+                </a:solidFill>
+                <a:latin typeface="Calibri" pitchFamily="34" charset="0"/>
+                <a:ea typeface="Calibri" pitchFamily="34" charset="-122"/>
+                <a:cs typeface="Calibri" pitchFamily="34" charset="-120"/>
+              </a:rPr>
+              <a:t>Later steps can reference earlier steps' output via {{step_output}} placeholders — a real fix, and a big unlock for multi-step processes.</a:t>
+            </a:r>
+            <a:endParaRPr lang="en-US" sz="1150" dirty="0"/>
+          </a:p>
+        </p:txBody>
+      </p:sp>
+    </p:spTree>
+  </p:cSld>
+  <p:clrMapOvr>
+    <a:masterClrMapping/>
+  </p:clrMapOvr>
+</p:sld>
+</file>
+
+<file path=ppt/slides/slide16.xml><?xml version="1.0" encoding="utf-8"?>
+<p:sld xmlns:a="http://schemas.openxmlformats.org/drawingml/2006/main" xmlns:r="http://schemas.openxmlformats.org/officeDocument/2006/relationships" xmlns:p="http://schemas.openxmlformats.org/presentationml/2006/main">
+  <p:cSld name="Slide 2">
+    <p:bg>
+      <p:bgPr>
+        <a:solidFill>
+          <a:srgbClr val="FFFFFF"/>
+        </a:solidFill>
+      </p:bgPr>
+    </p:bg>
+    <p:spTree>
+      <p:nvGrpSpPr>
+        <p:cNvPr id="1" name=""/>
+        <p:cNvGrpSpPr/>
+        <p:nvPr/>
+      </p:nvGrpSpPr>
+      <p:grpSpPr>
+        <a:xfrm>
+          <a:off x="0" y="0"/>
+          <a:ext cx="0" cy="0"/>
+          <a:chOff x="0" y="0"/>
+          <a:chExt cx="0" cy="0"/>
+        </a:xfrm>
+      </p:grpSpPr>
+      <p:sp>
+        <p:nvSpPr>
+          <p:cNvPr id="2" name="Text 0"/>
+          <p:cNvSpPr txBox="1"/>
+          <p:nvPr/>
+        </p:nvSpPr>
+        <p:spPr>
+          <a:xfrm>
+            <a:off x="548640" y="292608"/>
+            <a:ext cx="10972800" cy="320040"/>
+          </a:xfrm>
+          <a:prstGeom prst="rect">
+            <a:avLst/>
+          </a:prstGeom>
+          <a:noFill/>
+          <a:ln/>
+        </p:spPr>
+        <p:txBody>
+          <a:bodyPr wrap="square" lIns="0" tIns="0" rIns="0" bIns="0" rtlCol="0" anchor="ctr"/>
+          <a:lstStyle/>
+          <a:p>
+            <a:pPr indent="0" marL="0">
+              <a:buNone/>
+            </a:pPr>
+            <a:r>
+              <a:rPr lang="en-US" sz="1200" b="1" dirty="0">
+                <a:solidFill>
+                  <a:srgbClr val="028090"/>
+                </a:solidFill>
+                <a:latin typeface="Calibri" pitchFamily="34" charset="0"/>
+                <a:ea typeface="Calibri" pitchFamily="34" charset="-122"/>
+                <a:cs typeface="Calibri" pitchFamily="34" charset="-120"/>
+              </a:rPr>
+              <a:t>KEY CAPABILITIES</a:t>
+            </a:r>
+            <a:endParaRPr lang="en-US" sz="1200" dirty="0"/>
+          </a:p>
+        </p:txBody>
+      </p:sp>
+      <p:sp>
+        <p:nvSpPr>
+          <p:cNvPr id="3" name="Text 1"/>
+          <p:cNvSpPr txBox="1"/>
+          <p:nvPr/>
+        </p:nvSpPr>
+        <p:spPr>
+          <a:xfrm>
+            <a:off x="548640" y="566928"/>
+            <a:ext cx="10972800" cy="731520"/>
+          </a:xfrm>
+          <a:prstGeom prst="rect">
+            <a:avLst/>
+          </a:prstGeom>
+          <a:noFill/>
+          <a:ln/>
+        </p:spPr>
+        <p:txBody>
+          <a:bodyPr wrap="square" lIns="0" tIns="0" rIns="0" bIns="0" rtlCol="0" anchor="ctr"/>
+          <a:lstStyle/>
+          <a:p>
+            <a:pPr indent="0" marL="0">
+              <a:buNone/>
+            </a:pPr>
+            <a:r>
+              <a:rPr lang="en-US" sz="3000" b="1" dirty="0">
+                <a:solidFill>
+                  <a:srgbClr val="1E2761"/>
+                </a:solidFill>
+                <a:latin typeface="Cambria" pitchFamily="34" charset="0"/>
+                <a:ea typeface="Cambria" pitchFamily="34" charset="-122"/>
+                <a:cs typeface="Cambria" pitchFamily="34" charset="-120"/>
+              </a:rPr>
+              <a:t>Cost Control, Observability &amp; Reliability</a:t>
+            </a:r>
+            <a:endParaRPr lang="en-US" sz="3000" dirty="0"/>
+          </a:p>
+        </p:txBody>
+      </p:sp>
+      <p:sp>
+        <p:nvSpPr>
+          <p:cNvPr id="4" name="Shape 2"/>
+          <p:cNvSpPr/>
+          <p:nvPr/>
+        </p:nvSpPr>
+        <p:spPr>
+          <a:xfrm>
+            <a:off x="548640" y="1600200"/>
+            <a:ext cx="5257800" cy="2286000"/>
+          </a:xfrm>
+          <a:prstGeom prst="roundRect">
+            <a:avLst>
+              <a:gd name="adj" fmla="val 2400"/>
+            </a:avLst>
+          </a:prstGeom>
+          <a:solidFill>
+            <a:srgbClr val="F5F6FA"/>
+          </a:solidFill>
+          <a:ln/>
+        </p:spPr>
+      </p:sp>
+      <p:sp>
+        <p:nvSpPr>
+          <p:cNvPr id="5" name="Shape 3"/>
+          <p:cNvSpPr/>
+          <p:nvPr/>
+        </p:nvSpPr>
+        <p:spPr>
+          <a:xfrm>
+            <a:off x="777240" y="1801368"/>
+            <a:ext cx="91440" cy="1883664"/>
+          </a:xfrm>
+          <a:prstGeom prst="roundRect">
+            <a:avLst>
+              <a:gd name="adj" fmla="val 20000"/>
+            </a:avLst>
+          </a:prstGeom>
+          <a:solidFill>
+            <a:srgbClr val="028090"/>
+          </a:solidFill>
+          <a:ln/>
+        </p:spPr>
+      </p:sp>
+      <p:sp>
+        <p:nvSpPr>
+          <p:cNvPr id="6" name="Text 4"/>
+          <p:cNvSpPr txBox="1"/>
+          <p:nvPr/>
+        </p:nvSpPr>
+        <p:spPr>
+          <a:xfrm>
+            <a:off x="1051560" y="1764792"/>
+            <a:ext cx="4526280" cy="365760"/>
+          </a:xfrm>
+          <a:prstGeom prst="rect">
+            <a:avLst/>
+          </a:prstGeom>
+          <a:noFill/>
+          <a:ln/>
+        </p:spPr>
+        <p:txBody>
+          <a:bodyPr wrap="square" lIns="0" tIns="0" rIns="0" bIns="0" rtlCol="0" anchor="ctr"/>
+          <a:lstStyle/>
+          <a:p>
+            <a:pPr indent="0" marL="0">
+              <a:buNone/>
+            </a:pPr>
+            <a:r>
+              <a:rPr lang="en-US" sz="1550" b="1" dirty="0">
+                <a:solidFill>
+                  <a:srgbClr val="1E2761"/>
+                </a:solidFill>
+                <a:latin typeface="Calibri" pitchFamily="34" charset="0"/>
+                <a:ea typeface="Calibri" pitchFamily="34" charset="-122"/>
+                <a:cs typeface="Calibri" pitchFamily="34" charset="-120"/>
+              </a:rPr>
+              <a:t>💾 Prompt caching</a:t>
+            </a:r>
+            <a:endParaRPr lang="en-US" sz="1550" dirty="0"/>
+          </a:p>
+        </p:txBody>
+      </p:sp>
+      <p:sp>
+        <p:nvSpPr>
+          <p:cNvPr id="7" name="Text 5"/>
+          <p:cNvSpPr txBox="1"/>
+          <p:nvPr/>
+        </p:nvSpPr>
+        <p:spPr>
+          <a:xfrm>
+            <a:off x="1051560" y="2130552"/>
+            <a:ext cx="4526280" cy="1572768"/>
+          </a:xfrm>
+          <a:prstGeom prst="rect">
+            <a:avLst/>
+          </a:prstGeom>
+          <a:noFill/>
+          <a:ln/>
+        </p:spPr>
+        <p:txBody>
+          <a:bodyPr wrap="square" lIns="0" tIns="0" rIns="0" bIns="0" rtlCol="0" anchor="t"/>
+          <a:lstStyle/>
+          <a:p>
+            <a:pPr indent="0" marL="0">
+              <a:buNone/>
+            </a:pPr>
+            <a:r>
+              <a:rPr lang="en-US" sz="1150" dirty="0">
+                <a:solidFill>
+                  <a:srgbClr val="5A5A6E"/>
+                </a:solidFill>
+                <a:latin typeface="Calibri" pitchFamily="34" charset="0"/>
+                <a:ea typeface="Calibri" pitchFamily="34" charset="-122"/>
+                <a:cs typeface="Calibri" pitchFamily="34" charset="-120"/>
+              </a:rPr>
+              <a:t>Opt any step into an Anthropic cache breakpoint — no extra plumbing, just a config key.</a:t>
+            </a:r>
+            <a:endParaRPr lang="en-US" sz="1150" dirty="0"/>
+          </a:p>
+        </p:txBody>
+      </p:sp>
+      <p:sp>
+        <p:nvSpPr>
+          <p:cNvPr id="8" name="Shape 6"/>
+          <p:cNvSpPr/>
+          <p:nvPr/>
+        </p:nvSpPr>
+        <p:spPr>
+          <a:xfrm>
+            <a:off x="6263640" y="1600200"/>
+            <a:ext cx="5257800" cy="2286000"/>
+          </a:xfrm>
+          <a:prstGeom prst="roundRect">
+            <a:avLst>
+              <a:gd name="adj" fmla="val 2400"/>
+            </a:avLst>
+          </a:prstGeom>
+          <a:solidFill>
+            <a:srgbClr val="F5F6FA"/>
+          </a:solidFill>
+          <a:ln/>
+        </p:spPr>
+      </p:sp>
+      <p:sp>
+        <p:nvSpPr>
+          <p:cNvPr id="9" name="Shape 7"/>
+          <p:cNvSpPr/>
+          <p:nvPr/>
+        </p:nvSpPr>
+        <p:spPr>
+          <a:xfrm>
+            <a:off x="6492240" y="1801368"/>
+            <a:ext cx="91440" cy="1883664"/>
+          </a:xfrm>
+          <a:prstGeom prst="roundRect">
+            <a:avLst>
+              <a:gd name="adj" fmla="val 20000"/>
+            </a:avLst>
+          </a:prstGeom>
+          <a:solidFill>
+            <a:srgbClr val="2F3C7E"/>
+          </a:solidFill>
+          <a:ln/>
+        </p:spPr>
+      </p:sp>
+      <p:sp>
+        <p:nvSpPr>
+          <p:cNvPr id="10" name="Text 8"/>
+          <p:cNvSpPr txBox="1"/>
+          <p:nvPr/>
+        </p:nvSpPr>
+        <p:spPr>
+          <a:xfrm>
+            <a:off x="6766560" y="1764792"/>
+            <a:ext cx="4526280" cy="365760"/>
+          </a:xfrm>
+          <a:prstGeom prst="rect">
+            <a:avLst/>
+          </a:prstGeom>
+          <a:noFill/>
+          <a:ln/>
+        </p:spPr>
+        <p:txBody>
+          <a:bodyPr wrap="square" lIns="0" tIns="0" rIns="0" bIns="0" rtlCol="0" anchor="ctr"/>
+          <a:lstStyle/>
+          <a:p>
+            <a:pPr indent="0" marL="0">
+              <a:buNone/>
+            </a:pPr>
+            <a:r>
+              <a:rPr lang="en-US" sz="1550" b="1" dirty="0">
+                <a:solidFill>
+                  <a:srgbClr val="1E2761"/>
+                </a:solidFill>
+                <a:latin typeface="Calibri" pitchFamily="34" charset="0"/>
+                <a:ea typeface="Calibri" pitchFamily="34" charset="-122"/>
+                <a:cs typeface="Calibri" pitchFamily="34" charset="-120"/>
+              </a:rPr>
+              <a:t>📊 Richer execute() results</a:t>
+            </a:r>
+            <a:endParaRPr lang="en-US" sz="1550" dirty="0"/>
+          </a:p>
+        </p:txBody>
+      </p:sp>
+      <p:sp>
+        <p:nvSpPr>
+          <p:cNvPr id="11" name="Text 9"/>
+          <p:cNvSpPr txBox="1"/>
+          <p:nvPr/>
+        </p:nvSpPr>
+        <p:spPr>
+          <a:xfrm>
+            <a:off x="6766560" y="2130552"/>
+            <a:ext cx="4526280" cy="1572768"/>
+          </a:xfrm>
+          <a:prstGeom prst="rect">
+            <a:avLst/>
+          </a:prstGeom>
+          <a:noFill/>
+          <a:ln/>
+        </p:spPr>
+        <p:txBody>
+          <a:bodyPr wrap="square" lIns="0" tIns="0" rIns="0" bIns="0" rtlCol="0" anchor="t"/>
+          <a:lstStyle/>
+          <a:p>
+            <a:pPr indent="0" marL="0">
+              <a:buNone/>
+            </a:pPr>
+            <a:r>
+              <a:rPr lang="en-US" sz="1150" dirty="0">
+                <a:solidFill>
+                  <a:srgbClr val="5A5A6E"/>
+                </a:solidFill>
+                <a:latin typeface="Calibri" pitchFamily="34" charset="0"/>
+                <a:ea typeface="Calibri" pitchFamily="34" charset="-122"/>
+                <a:cs typeface="Calibri" pitchFamily="34" charset="-120"/>
+              </a:rPr>
+              <a:t>Usage, latency, stop reason, session ID, tool calls — structured, not just a string.</a:t>
+            </a:r>
+            <a:endParaRPr lang="en-US" sz="1150" dirty="0"/>
+          </a:p>
+        </p:txBody>
+      </p:sp>
+      <p:sp>
+        <p:nvSpPr>
+          <p:cNvPr id="12" name="Shape 10"/>
+          <p:cNvSpPr/>
+          <p:nvPr/>
+        </p:nvSpPr>
+        <p:spPr>
+          <a:xfrm>
+            <a:off x="548640" y="4206240"/>
+            <a:ext cx="5257800" cy="2286000"/>
+          </a:xfrm>
+          <a:prstGeom prst="roundRect">
+            <a:avLst>
+              <a:gd name="adj" fmla="val 2400"/>
+            </a:avLst>
+          </a:prstGeom>
+          <a:solidFill>
+            <a:srgbClr val="F5F6FA"/>
+          </a:solidFill>
+          <a:ln/>
+        </p:spPr>
+      </p:sp>
+      <p:sp>
+        <p:nvSpPr>
+          <p:cNvPr id="13" name="Shape 11"/>
+          <p:cNvSpPr/>
+          <p:nvPr/>
+        </p:nvSpPr>
+        <p:spPr>
+          <a:xfrm>
+            <a:off x="777240" y="4407408"/>
+            <a:ext cx="91440" cy="1883664"/>
+          </a:xfrm>
+          <a:prstGeom prst="roundRect">
+            <a:avLst>
+              <a:gd name="adj" fmla="val 20000"/>
+            </a:avLst>
+          </a:prstGeom>
+          <a:solidFill>
+            <a:srgbClr val="B85042"/>
+          </a:solidFill>
+          <a:ln/>
+        </p:spPr>
+      </p:sp>
+      <p:sp>
+        <p:nvSpPr>
+          <p:cNvPr id="14" name="Text 12"/>
+          <p:cNvSpPr txBox="1"/>
+          <p:nvPr/>
+        </p:nvSpPr>
+        <p:spPr>
+          <a:xfrm>
+            <a:off x="1051560" y="4370832"/>
+            <a:ext cx="4526280" cy="365760"/>
+          </a:xfrm>
+          <a:prstGeom prst="rect">
+            <a:avLst/>
+          </a:prstGeom>
+          <a:noFill/>
+          <a:ln/>
+        </p:spPr>
+        <p:txBody>
+          <a:bodyPr wrap="square" lIns="0" tIns="0" rIns="0" bIns="0" rtlCol="0" anchor="ctr"/>
+          <a:lstStyle/>
+          <a:p>
+            <a:pPr indent="0" marL="0">
+              <a:buNone/>
+            </a:pPr>
+            <a:r>
+              <a:rPr lang="en-US" sz="1550" b="1" dirty="0">
+                <a:solidFill>
+                  <a:srgbClr val="1E2761"/>
+                </a:solidFill>
+                <a:latin typeface="Calibri" pitchFamily="34" charset="0"/>
+                <a:ea typeface="Calibri" pitchFamily="34" charset="-122"/>
+                <a:cs typeface="Calibri" pitchFamily="34" charset="-120"/>
+              </a:rPr>
+              <a:t>🌐 Custom endpoint support</a:t>
+            </a:r>
+            <a:endParaRPr lang="en-US" sz="1550" dirty="0"/>
+          </a:p>
+        </p:txBody>
+      </p:sp>
+      <p:sp>
+        <p:nvSpPr>
+          <p:cNvPr id="15" name="Text 13"/>
+          <p:cNvSpPr txBox="1"/>
+          <p:nvPr/>
+        </p:nvSpPr>
+        <p:spPr>
+          <a:xfrm>
+            <a:off x="1051560" y="4736592"/>
+            <a:ext cx="4526280" cy="1572768"/>
+          </a:xfrm>
+          <a:prstGeom prst="rect">
+            <a:avLst/>
+          </a:prstGeom>
+          <a:noFill/>
+          <a:ln/>
+        </p:spPr>
+        <p:txBody>
+          <a:bodyPr wrap="square" lIns="0" tIns="0" rIns="0" bIns="0" rtlCol="0" anchor="t"/>
+          <a:lstStyle/>
+          <a:p>
+            <a:pPr indent="0" marL="0">
+              <a:buNone/>
+            </a:pPr>
+            <a:r>
+              <a:rPr lang="en-US" sz="1150" dirty="0">
+                <a:solidFill>
+                  <a:srgbClr val="5A5A6E"/>
+                </a:solidFill>
+                <a:latin typeface="Calibri" pitchFamily="34" charset="0"/>
+                <a:ea typeface="Calibri" pitchFamily="34" charset="-122"/>
+                <a:cs typeface="Calibri" pitchFamily="34" charset="-120"/>
+              </a:rPr>
+              <a:t>ANTHROPIC_BASE_URL threaded through everywhere, for teams routing via a proxy or gateway.</a:t>
+            </a:r>
+            <a:endParaRPr lang="en-US" sz="1150" dirty="0"/>
+          </a:p>
+        </p:txBody>
+      </p:sp>
+      <p:sp>
+        <p:nvSpPr>
+          <p:cNvPr id="16" name="Shape 14"/>
+          <p:cNvSpPr/>
+          <p:nvPr/>
+        </p:nvSpPr>
+        <p:spPr>
+          <a:xfrm>
+            <a:off x="6263640" y="4206240"/>
+            <a:ext cx="5257800" cy="2286000"/>
+          </a:xfrm>
+          <a:prstGeom prst="roundRect">
+            <a:avLst>
+              <a:gd name="adj" fmla="val 2400"/>
+            </a:avLst>
+          </a:prstGeom>
+          <a:solidFill>
+            <a:srgbClr val="F5F6FA"/>
+          </a:solidFill>
+          <a:ln/>
+        </p:spPr>
+      </p:sp>
+      <p:sp>
+        <p:nvSpPr>
+          <p:cNvPr id="17" name="Shape 15"/>
+          <p:cNvSpPr/>
+          <p:nvPr/>
+        </p:nvSpPr>
+        <p:spPr>
+          <a:xfrm>
+            <a:off x="6492240" y="4407408"/>
+            <a:ext cx="91440" cy="1883664"/>
+          </a:xfrm>
+          <a:prstGeom prst="roundRect">
+            <a:avLst>
+              <a:gd name="adj" fmla="val 20000"/>
+            </a:avLst>
+          </a:prstGeom>
+          <a:solidFill>
+            <a:srgbClr val="990011"/>
+          </a:solidFill>
+          <a:ln/>
+        </p:spPr>
+      </p:sp>
+      <p:sp>
+        <p:nvSpPr>
+          <p:cNvPr id="18" name="Text 16"/>
+          <p:cNvSpPr txBox="1"/>
+          <p:nvPr/>
+        </p:nvSpPr>
+        <p:spPr>
+          <a:xfrm>
+            <a:off x="6766560" y="4370832"/>
+            <a:ext cx="4526280" cy="365760"/>
+          </a:xfrm>
+          <a:prstGeom prst="rect">
+            <a:avLst/>
+          </a:prstGeom>
+          <a:noFill/>
+          <a:ln/>
+        </p:spPr>
+        <p:txBody>
+          <a:bodyPr wrap="square" lIns="0" tIns="0" rIns="0" bIns="0" rtlCol="0" anchor="ctr"/>
+          <a:lstStyle/>
+          <a:p>
+            <a:pPr indent="0" marL="0">
+              <a:buNone/>
+            </a:pPr>
+            <a:r>
+              <a:rPr lang="en-US" sz="1550" b="1" dirty="0">
+                <a:solidFill>
+                  <a:srgbClr val="1E2761"/>
+                </a:solidFill>
+                <a:latin typeface="Calibri" pitchFamily="34" charset="0"/>
+                <a:ea typeface="Calibri" pitchFamily="34" charset="-122"/>
+                <a:cs typeface="Calibri" pitchFamily="34" charset="-120"/>
+              </a:rPr>
+              <a:t>🔍 Deeper tracing</a:t>
+            </a:r>
+            <a:endParaRPr lang="en-US" sz="1550" dirty="0"/>
+          </a:p>
+        </p:txBody>
+      </p:sp>
+      <p:sp>
+        <p:nvSpPr>
+          <p:cNvPr id="19" name="Text 17"/>
+          <p:cNvSpPr txBox="1"/>
+          <p:nvPr/>
+        </p:nvSpPr>
+        <p:spPr>
+          <a:xfrm>
+            <a:off x="6766560" y="4736592"/>
+            <a:ext cx="4526280" cy="1572768"/>
+          </a:xfrm>
+          <a:prstGeom prst="rect">
+            <a:avLst/>
+          </a:prstGeom>
+          <a:noFill/>
+          <a:ln/>
+        </p:spPr>
+        <p:txBody>
+          <a:bodyPr wrap="square" lIns="0" tIns="0" rIns="0" bIns="0" rtlCol="0" anchor="t"/>
+          <a:lstStyle/>
+          <a:p>
+            <a:pPr indent="0" marL="0">
+              <a:buNone/>
+            </a:pPr>
+            <a:r>
+              <a:rPr lang="en-US" sz="1150" dirty="0">
+                <a:solidFill>
+                  <a:srgbClr val="5A5A6E"/>
+                </a:solidFill>
+                <a:latin typeface="Calibri" pitchFamily="34" charset="0"/>
+                <a:ea typeface="Calibri" pitchFamily="34" charset="-122"/>
+                <a:cs typeface="Calibri" pitchFamily="34" charset="-120"/>
+              </a:rPr>
+              <a:t>Logs now show exactly what was sent to the model, not just a summary after the fact.</a:t>
+            </a:r>
+            <a:endParaRPr lang="en-US" sz="1150" dirty="0"/>
+          </a:p>
+        </p:txBody>
+      </p:sp>
+    </p:spTree>
+  </p:cSld>
+  <p:clrMapOvr>
+    <a:masterClrMapping/>
+  </p:clrMapOvr>
+</p:sld>
+</file>
+
+<file path=ppt/slides/slide17.xml><?xml version="1.0" encoding="utf-8"?>
+<p:sld xmlns:a="http://schemas.openxmlformats.org/drawingml/2006/main" xmlns:r="http://schemas.openxmlformats.org/officeDocument/2006/relationships" xmlns:p="http://schemas.openxmlformats.org/presentationml/2006/main">
+  <p:cSld name="Slide 1">
+    <p:bg>
+      <p:bgPr>
+        <a:solidFill>
+          <a:srgbClr val="FFFFFF"/>
+        </a:solidFill>
+      </p:bgPr>
+    </p:bg>
+    <p:spTree>
+      <p:nvGrpSpPr>
+        <p:cNvPr id="1" name=""/>
+        <p:cNvGrpSpPr/>
+        <p:nvPr/>
+      </p:nvGrpSpPr>
+      <p:grpSpPr>
+        <a:xfrm>
+          <a:off x="0" y="0"/>
+          <a:ext cx="0" cy="0"/>
+          <a:chOff x="0" y="0"/>
+          <a:chExt cx="0" cy="0"/>
+        </a:xfrm>
+      </p:grpSpPr>
+      <p:sp>
+        <p:nvSpPr>
+          <p:cNvPr id="2" name="Text 0"/>
+          <p:cNvSpPr txBox="1"/>
+          <p:nvPr/>
+        </p:nvSpPr>
+        <p:spPr>
+          <a:xfrm>
+            <a:off x="548640" y="292608"/>
+            <a:ext cx="10972800" cy="320040"/>
+          </a:xfrm>
+          <a:prstGeom prst="rect">
+            <a:avLst/>
+          </a:prstGeom>
+          <a:noFill/>
+          <a:ln/>
+        </p:spPr>
+        <p:txBody>
+          <a:bodyPr wrap="square" lIns="0" tIns="0" rIns="0" bIns="0" rtlCol="0" anchor="ctr"/>
+          <a:lstStyle/>
+          <a:p>
+            <a:pPr indent="0" marL="0">
+              <a:buNone/>
+            </a:pPr>
+            <a:r>
+              <a:rPr lang="en-US" sz="1200" b="1" dirty="0">
+                <a:solidFill>
+                  <a:srgbClr val="028090"/>
+                </a:solidFill>
+                <a:latin typeface="Calibri" pitchFamily="34" charset="0"/>
+                <a:ea typeface="Calibri" pitchFamily="34" charset="-122"/>
+                <a:cs typeface="Calibri" pitchFamily="34" charset="-120"/>
+              </a:rPr>
+              <a:t>KEY CAPABILITIES · DEPLOYMENT</a:t>
+            </a:r>
+            <a:endParaRPr lang="en-US" sz="1200" dirty="0"/>
+          </a:p>
+        </p:txBody>
+      </p:sp>
+      <p:sp>
+        <p:nvSpPr>
+          <p:cNvPr id="3" name="Text 1"/>
+          <p:cNvSpPr txBox="1"/>
+          <p:nvPr/>
+        </p:nvSpPr>
+        <p:spPr>
+          <a:xfrm>
+            <a:off x="548640" y="566928"/>
+            <a:ext cx="10972800" cy="731520"/>
+          </a:xfrm>
+          <a:prstGeom prst="rect">
+            <a:avLst/>
+          </a:prstGeom>
+          <a:noFill/>
+          <a:ln/>
+        </p:spPr>
+        <p:txBody>
+          <a:bodyPr wrap="square" lIns="0" tIns="0" rIns="0" bIns="0" rtlCol="0" anchor="ctr"/>
+          <a:lstStyle/>
+          <a:p>
+            <a:pPr indent="0" marL="0">
+              <a:buNone/>
+            </a:pPr>
+            <a:r>
+              <a:rPr lang="en-US" sz="3000" b="1" dirty="0">
+                <a:solidFill>
+                  <a:srgbClr val="1E2761"/>
+                </a:solidFill>
+                <a:latin typeface="Cambria" pitchFamily="34" charset="0"/>
+                <a:ea typeface="Cambria" pitchFamily="34" charset="-122"/>
+                <a:cs typeface="Cambria" pitchFamily="34" charset="-120"/>
+              </a:rPr>
+              <a:t>🐳 Deploy with Docker — One Flag</a:t>
+            </a:r>
+            <a:endParaRPr lang="en-US" sz="3000" dirty="0"/>
+          </a:p>
+        </p:txBody>
+      </p:sp>
+      <p:sp>
+        <p:nvSpPr>
+          <p:cNvPr id="4" name="Shape 2"/>
+          <p:cNvSpPr/>
+          <p:nvPr/>
+        </p:nvSpPr>
+        <p:spPr>
+          <a:xfrm>
+            <a:off x="548640" y="1600200"/>
+            <a:ext cx="5257800" cy="2286000"/>
+          </a:xfrm>
+          <a:prstGeom prst="roundRect">
+            <a:avLst>
+              <a:gd name="adj" fmla="val 2400"/>
+            </a:avLst>
+          </a:prstGeom>
+          <a:solidFill>
+            <a:srgbClr val="F5F6FA"/>
+          </a:solidFill>
+          <a:ln/>
+        </p:spPr>
+      </p:sp>
+      <p:sp>
+        <p:nvSpPr>
+          <p:cNvPr id="5" name="Shape 3"/>
+          <p:cNvSpPr/>
+          <p:nvPr/>
+        </p:nvSpPr>
+        <p:spPr>
+          <a:xfrm>
+            <a:off x="777240" y="1801368"/>
+            <a:ext cx="91440" cy="1883664"/>
+          </a:xfrm>
+          <a:prstGeom prst="roundRect">
+            <a:avLst>
+              <a:gd name="adj" fmla="val 20000"/>
+            </a:avLst>
+          </a:prstGeom>
+          <a:solidFill>
+            <a:srgbClr val="990011"/>
+          </a:solidFill>
+          <a:ln/>
+        </p:spPr>
+      </p:sp>
+      <p:sp>
+        <p:nvSpPr>
+          <p:cNvPr id="6" name="Text 4"/>
+          <p:cNvSpPr txBox="1"/>
+          <p:nvPr/>
+        </p:nvSpPr>
+        <p:spPr>
+          <a:xfrm>
+            <a:off x="1051560" y="1764792"/>
+            <a:ext cx="4526280" cy="365760"/>
+          </a:xfrm>
+          <a:prstGeom prst="rect">
+            <a:avLst/>
+          </a:prstGeom>
+          <a:noFill/>
+          <a:ln/>
+        </p:spPr>
+        <p:txBody>
+          <a:bodyPr wrap="square" lIns="0" tIns="0" rIns="0" bIns="0" rtlCol="0" anchor="ctr"/>
+          <a:lstStyle/>
+          <a:p>
+            <a:pPr indent="0" marL="0">
+              <a:buNone/>
+            </a:pPr>
+            <a:r>
+              <a:rPr lang="en-US" sz="1550" b="1" dirty="0">
+                <a:solidFill>
+                  <a:srgbClr val="1E2761"/>
+                </a:solidFill>
+                <a:latin typeface="Calibri" pitchFamily="34" charset="0"/>
+                <a:ea typeface="Calibri" pitchFamily="34" charset="-122"/>
+                <a:cs typeface="Calibri" pitchFamily="34" charset="-120"/>
+              </a:rPr>
+              <a:t>One-flag Docker scaffolding</a:t>
+            </a:r>
+            <a:endParaRPr lang="en-US" sz="1550" dirty="0"/>
+          </a:p>
+        </p:txBody>
+      </p:sp>
+      <p:sp>
+        <p:nvSpPr>
+          <p:cNvPr id="7" name="Text 5"/>
+          <p:cNvSpPr txBox="1"/>
+          <p:nvPr/>
+        </p:nvSpPr>
+        <p:spPr>
+          <a:xfrm>
+            <a:off x="1051560" y="2130552"/>
+            <a:ext cx="4526280" cy="1572768"/>
+          </a:xfrm>
+          <a:prstGeom prst="rect">
+            <a:avLst/>
+          </a:prstGeom>
+          <a:noFill/>
+          <a:ln/>
+        </p:spPr>
+        <p:txBody>
+          <a:bodyPr wrap="square" lIns="0" tIns="0" rIns="0" bIns="0" rtlCol="0" anchor="t"/>
+          <a:lstStyle/>
+          <a:p>
+            <a:pPr indent="0" marL="0">
+              <a:buNone/>
+            </a:pPr>
+            <a:r>
+              <a:rPr lang="en-US" sz="1150" dirty="0">
+                <a:solidFill>
+                  <a:srgbClr val="5A5A6E"/>
+                </a:solidFill>
+                <a:latin typeface="Calibri" pitchFamily="34" charset="0"/>
+                <a:ea typeface="Calibri" pitchFamily="34" charset="-122"/>
+                <a:cs typeface="Calibri" pitchFamily="34" charset="-120"/>
+              </a:rPr>
+              <a:t>cpa new --docker-project yes generates a full deployment kit: Dockerfile, docker-compose.yml, .dockerignore, and a FastAPI wrapper around your process — GET /health and a live endpoint, ready to build and run.</a:t>
+            </a:r>
+            <a:endParaRPr lang="en-US" sz="1150" dirty="0"/>
+          </a:p>
+        </p:txBody>
+      </p:sp>
+      <p:sp>
+        <p:nvSpPr>
+          <p:cNvPr id="8" name="Shape 6"/>
+          <p:cNvSpPr/>
+          <p:nvPr/>
+        </p:nvSpPr>
+        <p:spPr>
+          <a:xfrm>
+            <a:off x="6263640" y="1600200"/>
+            <a:ext cx="5257800" cy="2286000"/>
+          </a:xfrm>
+          <a:prstGeom prst="roundRect">
+            <a:avLst>
+              <a:gd name="adj" fmla="val 2400"/>
+            </a:avLst>
+          </a:prstGeom>
+          <a:solidFill>
+            <a:srgbClr val="F5F6FA"/>
+          </a:solidFill>
+          <a:ln/>
+        </p:spPr>
+      </p:sp>
+      <p:sp>
+        <p:nvSpPr>
+          <p:cNvPr id="9" name="Shape 7"/>
+          <p:cNvSpPr/>
+          <p:nvPr/>
+        </p:nvSpPr>
+        <p:spPr>
+          <a:xfrm>
+            <a:off x="6492240" y="1801368"/>
+            <a:ext cx="91440" cy="1883664"/>
+          </a:xfrm>
+          <a:prstGeom prst="roundRect">
+            <a:avLst>
+              <a:gd name="adj" fmla="val 20000"/>
+            </a:avLst>
+          </a:prstGeom>
+          <a:solidFill>
+            <a:srgbClr val="028090"/>
+          </a:solidFill>
+          <a:ln/>
+        </p:spPr>
+      </p:sp>
+      <p:sp>
+        <p:nvSpPr>
+          <p:cNvPr id="10" name="Text 8"/>
+          <p:cNvSpPr txBox="1"/>
+          <p:nvPr/>
+        </p:nvSpPr>
+        <p:spPr>
+          <a:xfrm>
+            <a:off x="6766560" y="1764792"/>
+            <a:ext cx="4526280" cy="365760"/>
+          </a:xfrm>
+          <a:prstGeom prst="rect">
+            <a:avLst/>
+          </a:prstGeom>
+          <a:noFill/>
+          <a:ln/>
+        </p:spPr>
+        <p:txBody>
+          <a:bodyPr wrap="square" lIns="0" tIns="0" rIns="0" bIns="0" rtlCol="0" anchor="ctr"/>
+          <a:lstStyle/>
+          <a:p>
+            <a:pPr indent="0" marL="0">
+              <a:buNone/>
+            </a:pPr>
+            <a:r>
+              <a:rPr lang="en-US" sz="1550" b="1" dirty="0">
+                <a:solidFill>
+                  <a:srgbClr val="1E2761"/>
+                </a:solidFill>
+                <a:latin typeface="Calibri" pitchFamily="34" charset="0"/>
+                <a:ea typeface="Calibri" pitchFamily="34" charset="-122"/>
+                <a:cs typeface="Calibri" pitchFamily="34" charset="-120"/>
+              </a:rPr>
+              <a:t>Host session auth in containers</a:t>
+            </a:r>
+            <a:endParaRPr lang="en-US" sz="1550" dirty="0"/>
+          </a:p>
+        </p:txBody>
+      </p:sp>
+      <p:sp>
+        <p:nvSpPr>
+          <p:cNvPr id="11" name="Text 9"/>
+          <p:cNvSpPr txBox="1"/>
+          <p:nvPr/>
+        </p:nvSpPr>
+        <p:spPr>
+          <a:xfrm>
+            <a:off x="6766560" y="2130552"/>
+            <a:ext cx="4526280" cy="1572768"/>
+          </a:xfrm>
+          <a:prstGeom prst="rect">
+            <a:avLst/>
+          </a:prstGeom>
+          <a:noFill/>
+          <a:ln/>
+        </p:spPr>
+        <p:txBody>
+          <a:bodyPr wrap="square" lIns="0" tIns="0" rIns="0" bIns="0" rtlCol="0" anchor="t"/>
+          <a:lstStyle/>
+          <a:p>
+            <a:pPr indent="0" marL="0">
+              <a:buNone/>
+            </a:pPr>
+            <a:r>
+              <a:rPr lang="en-US" sz="1150" dirty="0">
+                <a:solidFill>
+                  <a:srgbClr val="5A5A6E"/>
+                </a:solidFill>
+                <a:latin typeface="Calibri" pitchFamily="34" charset="0"/>
+                <a:ea typeface="Calibri" pitchFamily="34" charset="-122"/>
+                <a:cs typeface="Calibri" pitchFamily="34" charset="-120"/>
+              </a:rPr>
+              <a:t>docker-compose.yml bind-mounts your existing claude login session (~/.claude, ~/.claude.json) into the container by default — falls back to ANTHROPIC_API_KEY if it's not present. No key required just to test a deployment.</a:t>
+            </a:r>
+            <a:endParaRPr lang="en-US" sz="1150" dirty="0"/>
+          </a:p>
+        </p:txBody>
+      </p:sp>
+      <p:sp>
+        <p:nvSpPr>
+          <p:cNvPr id="12" name="Shape 10"/>
+          <p:cNvSpPr/>
+          <p:nvPr/>
+        </p:nvSpPr>
+        <p:spPr>
+          <a:xfrm>
+            <a:off x="548640" y="4206240"/>
+            <a:ext cx="5257800" cy="2286000"/>
+          </a:xfrm>
+          <a:prstGeom prst="roundRect">
+            <a:avLst>
+              <a:gd name="adj" fmla="val 2400"/>
+            </a:avLst>
+          </a:prstGeom>
+          <a:solidFill>
+            <a:srgbClr val="F5F6FA"/>
+          </a:solidFill>
+          <a:ln/>
+        </p:spPr>
+      </p:sp>
+      <p:sp>
+        <p:nvSpPr>
+          <p:cNvPr id="13" name="Shape 11"/>
+          <p:cNvSpPr/>
+          <p:nvPr/>
+        </p:nvSpPr>
+        <p:spPr>
+          <a:xfrm>
+            <a:off x="777240" y="4407408"/>
+            <a:ext cx="91440" cy="1883664"/>
+          </a:xfrm>
+          <a:prstGeom prst="roundRect">
+            <a:avLst>
+              <a:gd name="adj" fmla="val 20000"/>
+            </a:avLst>
+          </a:prstGeom>
+          <a:solidFill>
+            <a:srgbClr val="2F3C7E"/>
+          </a:solidFill>
+          <a:ln/>
+        </p:spPr>
+      </p:sp>
+      <p:sp>
+        <p:nvSpPr>
+          <p:cNvPr id="14" name="Text 12"/>
+          <p:cNvSpPr txBox="1"/>
+          <p:nvPr/>
+        </p:nvSpPr>
+        <p:spPr>
+          <a:xfrm>
+            <a:off x="1051560" y="4370832"/>
+            <a:ext cx="4526280" cy="365760"/>
+          </a:xfrm>
+          <a:prstGeom prst="rect">
+            <a:avLst/>
+          </a:prstGeom>
+          <a:noFill/>
+          <a:ln/>
+        </p:spPr>
+        <p:txBody>
+          <a:bodyPr wrap="square" lIns="0" tIns="0" rIns="0" bIns="0" rtlCol="0" anchor="ctr"/>
+          <a:lstStyle/>
+          <a:p>
+            <a:pPr indent="0" marL="0">
+              <a:buNone/>
+            </a:pPr>
+            <a:r>
+              <a:rPr lang="en-US" sz="1550" b="1" dirty="0">
+                <a:solidFill>
+                  <a:srgbClr val="1E2761"/>
+                </a:solidFill>
+                <a:latin typeface="Calibri" pitchFamily="34" charset="0"/>
+                <a:ea typeface="Calibri" pitchFamily="34" charset="-122"/>
+                <a:cs typeface="Calibri" pitchFamily="34" charset="-120"/>
+              </a:rPr>
+              <a:t>Independent of --sample-needed</a:t>
+            </a:r>
+            <a:endParaRPr lang="en-US" sz="1550" dirty="0"/>
+          </a:p>
+        </p:txBody>
+      </p:sp>
+      <p:sp>
+        <p:nvSpPr>
+          <p:cNvPr id="15" name="Text 13"/>
+          <p:cNvSpPr txBox="1"/>
+          <p:nvPr/>
+        </p:nvSpPr>
+        <p:spPr>
+          <a:xfrm>
+            <a:off x="1051560" y="4736592"/>
+            <a:ext cx="4526280" cy="1572768"/>
+          </a:xfrm>
+          <a:prstGeom prst="rect">
+            <a:avLst/>
+          </a:prstGeom>
+          <a:noFill/>
+          <a:ln/>
+        </p:spPr>
+        <p:txBody>
+          <a:bodyPr wrap="square" lIns="0" tIns="0" rIns="0" bIns="0" rtlCol="0" anchor="t"/>
+          <a:lstStyle/>
+          <a:p>
+            <a:pPr indent="0" marL="0">
+              <a:buNone/>
+            </a:pPr>
+            <a:r>
+              <a:rPr lang="en-US" sz="1150" dirty="0">
+                <a:solidFill>
+                  <a:srgbClr val="5A5A6E"/>
+                </a:solidFill>
+                <a:latin typeface="Calibri" pitchFamily="34" charset="0"/>
+                <a:ea typeface="Calibri" pitchFamily="34" charset="-122"/>
+                <a:cs typeface="Calibri" pitchFamily="34" charset="-120"/>
+              </a:rPr>
+              <a:t>Works alongside the existing scaffold flags — pair it with a full sample process or a clean skeleton, whichever you're starting from.</a:t>
+            </a:r>
+            <a:endParaRPr lang="en-US" sz="1150" dirty="0"/>
+          </a:p>
+        </p:txBody>
+      </p:sp>
+      <p:sp>
+        <p:nvSpPr>
+          <p:cNvPr id="16" name="Shape 14"/>
+          <p:cNvSpPr/>
+          <p:nvPr/>
+        </p:nvSpPr>
+        <p:spPr>
+          <a:xfrm>
+            <a:off x="6263640" y="4206240"/>
+            <a:ext cx="5257800" cy="2286000"/>
+          </a:xfrm>
+          <a:prstGeom prst="roundRect">
+            <a:avLst>
+              <a:gd name="adj" fmla="val 2400"/>
+            </a:avLst>
+          </a:prstGeom>
+          <a:solidFill>
+            <a:srgbClr val="F5F6FA"/>
+          </a:solidFill>
+          <a:ln/>
+        </p:spPr>
+      </p:sp>
+      <p:sp>
+        <p:nvSpPr>
+          <p:cNvPr id="17" name="Shape 15"/>
+          <p:cNvSpPr/>
+          <p:nvPr/>
+        </p:nvSpPr>
+        <p:spPr>
+          <a:xfrm>
+            <a:off x="6492240" y="4407408"/>
+            <a:ext cx="91440" cy="1883664"/>
+          </a:xfrm>
+          <a:prstGeom prst="roundRect">
+            <a:avLst>
+              <a:gd name="adj" fmla="val 20000"/>
+            </a:avLst>
+          </a:prstGeom>
+          <a:solidFill>
+            <a:srgbClr val="B85042"/>
+          </a:solidFill>
+          <a:ln/>
+        </p:spPr>
+      </p:sp>
+      <p:sp>
+        <p:nvSpPr>
+          <p:cNvPr id="18" name="Text 16"/>
+          <p:cNvSpPr txBox="1"/>
+          <p:nvPr/>
+        </p:nvSpPr>
+        <p:spPr>
+          <a:xfrm>
+            <a:off x="6766560" y="4370832"/>
+            <a:ext cx="4526280" cy="365760"/>
+          </a:xfrm>
+          <a:prstGeom prst="rect">
+            <a:avLst/>
+          </a:prstGeom>
+          <a:noFill/>
+          <a:ln/>
+        </p:spPr>
+        <p:txBody>
+          <a:bodyPr wrap="square" lIns="0" tIns="0" rIns="0" bIns="0" rtlCol="0" anchor="ctr"/>
+          <a:lstStyle/>
+          <a:p>
+            <a:pPr indent="0" marL="0">
+              <a:buNone/>
+            </a:pPr>
+            <a:r>
+              <a:rPr lang="en-US" sz="1550" b="1" dirty="0">
+                <a:solidFill>
+                  <a:srgbClr val="1E2761"/>
+                </a:solidFill>
+                <a:latin typeface="Calibri" pitchFamily="34" charset="0"/>
+                <a:ea typeface="Calibri" pitchFamily="34" charset="-122"/>
+                <a:cs typeface="Calibri" pitchFamily="34" charset="-120"/>
+              </a:rPr>
+              <a:t>Hardened build, verified end-to-end</a:t>
+            </a:r>
+            <a:endParaRPr lang="en-US" sz="1550" dirty="0"/>
+          </a:p>
+        </p:txBody>
+      </p:sp>
+      <p:sp>
+        <p:nvSpPr>
+          <p:cNvPr id="19" name="Text 17"/>
+          <p:cNvSpPr txBox="1"/>
+          <p:nvPr/>
+        </p:nvSpPr>
+        <p:spPr>
+          <a:xfrm>
+            <a:off x="6766560" y="4736592"/>
+            <a:ext cx="4526280" cy="1572768"/>
+          </a:xfrm>
+          <a:prstGeom prst="rect">
+            <a:avLst/>
+          </a:prstGeom>
+          <a:noFill/>
+          <a:ln/>
+        </p:spPr>
+        <p:txBody>
+          <a:bodyPr wrap="square" lIns="0" tIns="0" rIns="0" bIns="0" rtlCol="0" anchor="t"/>
+          <a:lstStyle/>
+          <a:p>
+            <a:pPr indent="0" marL="0">
+              <a:buNone/>
+            </a:pPr>
+            <a:r>
+              <a:rPr lang="en-US" sz="1150" dirty="0">
+                <a:solidFill>
+                  <a:srgbClr val="5A5A6E"/>
+                </a:solidFill>
+                <a:latin typeface="Calibri" pitchFamily="34" charset="0"/>
+                <a:ea typeface="Calibri" pitchFamily="34" charset="-122"/>
+                <a:cs typeface="Calibri" pitchFamily="34" charset="-120"/>
+              </a:rPr>
+              <a:t>Fixed git availability and dependency install order in the base image. Verified: docker build succeeds, container starts, /health and the live endpoint respond correctly.</a:t>
+            </a:r>
+            <a:endParaRPr lang="en-US" sz="1150" dirty="0"/>
           </a:p>
         </p:txBody>
       </p:sp>
